--- a/S1-CL1-Cloud-Design-Build/delivery/topic_05/Topic_05_Slides.pptx
+++ b/S1-CL1-Cloud-Design-Build/delivery/topic_05/Topic_05_Slides.pptx
@@ -4,35 +4,32 @@
   <p:sldMasterIdLst>
     <p:sldMasterId id="2147483648" r:id="rId1"/>
   </p:sldMasterIdLst>
-  <p:notesMasterIdLst>
-    <p:notesMasterId r:id="rId25"/>
-  </p:notesMasterIdLst>
   <p:sldIdLst>
-    <p:sldId id="256" r:id="rId2"/>
-    <p:sldId id="257" r:id="rId3"/>
-    <p:sldId id="258" r:id="rId4"/>
-    <p:sldId id="259" r:id="rId5"/>
-    <p:sldId id="260" r:id="rId6"/>
-    <p:sldId id="261" r:id="rId7"/>
-    <p:sldId id="262" r:id="rId8"/>
-    <p:sldId id="263" r:id="rId9"/>
-    <p:sldId id="264" r:id="rId10"/>
-    <p:sldId id="265" r:id="rId11"/>
-    <p:sldId id="266" r:id="rId12"/>
-    <p:sldId id="267" r:id="rId13"/>
-    <p:sldId id="268" r:id="rId14"/>
-    <p:sldId id="269" r:id="rId15"/>
-    <p:sldId id="270" r:id="rId16"/>
-    <p:sldId id="271" r:id="rId17"/>
-    <p:sldId id="272" r:id="rId18"/>
-    <p:sldId id="273" r:id="rId19"/>
-    <p:sldId id="274" r:id="rId20"/>
-    <p:sldId id="275" r:id="rId21"/>
-    <p:sldId id="276" r:id="rId22"/>
-    <p:sldId id="277" r:id="rId23"/>
-    <p:sldId id="278" r:id="rId24"/>
+    <p:sldId id="256" r:id="rId7"/>
+    <p:sldId id="257" r:id="rId8"/>
+    <p:sldId id="258" r:id="rId10"/>
+    <p:sldId id="259" r:id="rId11"/>
+    <p:sldId id="260" r:id="rId12"/>
+    <p:sldId id="261" r:id="rId13"/>
+    <p:sldId id="262" r:id="rId14"/>
+    <p:sldId id="263" r:id="rId15"/>
+    <p:sldId id="264" r:id="rId16"/>
+    <p:sldId id="265" r:id="rId17"/>
+    <p:sldId id="266" r:id="rId18"/>
+    <p:sldId id="267" r:id="rId19"/>
+    <p:sldId id="268" r:id="rId20"/>
+    <p:sldId id="269" r:id="rId21"/>
+    <p:sldId id="270" r:id="rId22"/>
+    <p:sldId id="271" r:id="rId23"/>
+    <p:sldId id="272" r:id="rId24"/>
+    <p:sldId id="273" r:id="rId25"/>
+    <p:sldId id="274" r:id="rId26"/>
+    <p:sldId id="275" r:id="rId27"/>
+    <p:sldId id="276" r:id="rId28"/>
+    <p:sldId id="277" r:id="rId29"/>
+    <p:sldId id="278" r:id="rId30"/>
   </p:sldIdLst>
-  <p:sldSz cx="12192000" cy="6858000"/>
+  <p:sldSz cx="12191695" cy="6858000" type="screen4x3"/>
   <p:notesSz cx="6858000" cy="9144000"/>
   <p:defaultTextStyle>
     <a:defPPr>
@@ -129,27 +126,11 @@
       </a:defRPr>
     </a:lvl9pPr>
   </p:defaultTextStyle>
-  <p:extLst>
-    <p:ext uri="{EFAFB233-063F-42B5-8137-9DF3F51BA10A}">
-      <p15:sldGuideLst xmlns:p15="http://schemas.microsoft.com/office/powerpoint/2012/main">
-        <p15:guide id="1" orient="horz" pos="2160">
-          <p15:clr>
-            <a:srgbClr val="A4A3A4"/>
-          </p15:clr>
-        </p15:guide>
-        <p15:guide id="2" pos="2880">
-          <p15:clr>
-            <a:srgbClr val="A4A3A4"/>
-          </p15:clr>
-        </p15:guide>
-      </p15:sldGuideLst>
-    </p:ext>
-  </p:extLst>
 </p:presentation>
 </file>
 
 <file path=ppt/notesMasters/notesMaster1.xml><?xml version="1.0" encoding="utf-8"?>
-<p:notesMaster xmlns:a="http://schemas.openxmlformats.org/drawingml/2006/main" xmlns:r="http://schemas.openxmlformats.org/officeDocument/2006/relationships" xmlns:p="http://schemas.openxmlformats.org/presentationml/2006/main">
+<p:notesMaster xmlns:a="http://schemas.openxmlformats.org/drawingml/2006/main" xmlns:p="http://schemas.openxmlformats.org/presentationml/2006/main" xmlns:r="http://schemas.openxmlformats.org/officeDocument/2006/relationships">
   <p:cSld>
     <p:bg>
       <p:bgRef idx="1001">
@@ -183,7 +164,7 @@
         <p:spPr>
           <a:xfrm>
             <a:off x="0" y="0"/>
-            <a:ext cx="2971800" cy="458788"/>
+            <a:ext cx="2971800" cy="457200"/>
           </a:xfrm>
           <a:prstGeom prst="rect">
             <a:avLst/>
@@ -214,7 +195,7 @@
         <p:spPr>
           <a:xfrm>
             <a:off x="3884613" y="0"/>
-            <a:ext cx="2971800" cy="458788"/>
+            <a:ext cx="2971800" cy="457200"/>
           </a:xfrm>
           <a:prstGeom prst="rect">
             <a:avLst/>
@@ -228,9 +209,9 @@
             </a:lvl1pPr>
           </a:lstStyle>
           <a:p>
-            <a:fld id="{5BB44E12-6F80-1943-B909-1F93FD3819C5}" type="datetimeFigureOut">
+            <a:fld id="{0F89C1C7-3DCD-1040-A9CF-14679D8B5DDD}" type="datetimeFigureOut">
               <a:rPr lang="en-US" smtClean="0"/>
-              <a:t>7/22/26</a:t>
+              <a:t>10/17/16</a:t>
             </a:fld>
             <a:endParaRPr lang="en-US"/>
           </a:p>
@@ -248,8 +229,8 @@
         </p:nvSpPr>
         <p:spPr>
           <a:xfrm>
-            <a:off x="685800" y="1143000"/>
-            <a:ext cx="5486400" cy="3086100"/>
+            <a:off x="1143000" y="685800"/>
+            <a:ext cx="4572000" cy="3429000"/>
           </a:xfrm>
           <a:prstGeom prst="rect">
             <a:avLst/>
@@ -281,8 +262,8 @@
         </p:nvSpPr>
         <p:spPr>
           <a:xfrm>
-            <a:off x="685800" y="4400550"/>
-            <a:ext cx="5486400" cy="3600450"/>
+            <a:off x="685800" y="4343400"/>
+            <a:ext cx="5486400" cy="4114800"/>
           </a:xfrm>
           <a:prstGeom prst="rect">
             <a:avLst/>
@@ -294,35 +275,35 @@
           <a:p>
             <a:pPr lvl="0"/>
             <a:r>
-              <a:rPr lang="en-GB"/>
+              <a:rPr lang="en-US" smtClean="0"/>
               <a:t>Click to edit Master text styles</a:t>
             </a:r>
           </a:p>
           <a:p>
             <a:pPr lvl="1"/>
             <a:r>
-              <a:rPr lang="en-GB"/>
+              <a:rPr lang="en-US" smtClean="0"/>
               <a:t>Second level</a:t>
             </a:r>
           </a:p>
           <a:p>
             <a:pPr lvl="2"/>
             <a:r>
-              <a:rPr lang="en-GB"/>
+              <a:rPr lang="en-US" smtClean="0"/>
               <a:t>Third level</a:t>
             </a:r>
           </a:p>
           <a:p>
             <a:pPr lvl="3"/>
             <a:r>
-              <a:rPr lang="en-GB"/>
+              <a:rPr lang="en-US" smtClean="0"/>
               <a:t>Fourth level</a:t>
             </a:r>
           </a:p>
           <a:p>
             <a:pPr lvl="4"/>
             <a:r>
-              <a:rPr lang="en-GB"/>
+              <a:rPr lang="en-US" smtClean="0"/>
               <a:t>Fifth level</a:t>
             </a:r>
             <a:endParaRPr lang="en-US"/>
@@ -342,7 +323,7 @@
         <p:spPr>
           <a:xfrm>
             <a:off x="0" y="8685213"/>
-            <a:ext cx="2971800" cy="458787"/>
+            <a:ext cx="2971800" cy="457200"/>
           </a:xfrm>
           <a:prstGeom prst="rect">
             <a:avLst/>
@@ -373,7 +354,7 @@
         <p:spPr>
           <a:xfrm>
             <a:off x="3884613" y="8685213"/>
-            <a:ext cx="2971800" cy="458787"/>
+            <a:ext cx="2971800" cy="457200"/>
           </a:xfrm>
           <a:prstGeom prst="rect">
             <a:avLst/>
@@ -387,7 +368,7 @@
             </a:lvl1pPr>
           </a:lstStyle>
           <a:p>
-            <a:fld id="{3AFECE7C-5934-B040-8B72-BC817ED128E3}" type="slidenum">
+            <a:fld id="{BB5E49A5-4136-284D-997B-48E1D791AD67}" type="slidenum">
               <a:rPr lang="en-US" smtClean="0"/>
               <a:t>‹#›</a:t>
             </a:fld>
@@ -398,13 +379,13 @@
     </p:spTree>
     <p:extLst>
       <p:ext uri="{BB962C8B-B14F-4D97-AF65-F5344CB8AC3E}">
-        <p14:creationId xmlns:p14="http://schemas.microsoft.com/office/powerpoint/2010/main" val="4056332393"/>
+        <p14:creationId xmlns:p14="http://schemas.microsoft.com/office/powerpoint/2010/main" val="2623252185"/>
       </p:ext>
     </p:extLst>
   </p:cSld>
   <p:clrMap bg1="lt1" tx1="dk1" bg2="lt2" tx2="dk2" accent1="accent1" accent2="accent2" accent3="accent3" accent4="accent4" accent5="accent5" accent6="accent6" hlink="hlink" folHlink="folHlink"/>
   <p:notesStyle>
-    <a:lvl1pPr marL="0" algn="l" defTabSz="914400" rtl="0" eaLnBrk="1" latinLnBrk="0" hangingPunct="1">
+    <a:lvl1pPr marL="0" algn="l" defTabSz="457200" rtl="0" eaLnBrk="1" latinLnBrk="0" hangingPunct="1">
       <a:defRPr sz="1200" kern="1200">
         <a:solidFill>
           <a:schemeClr val="tx1"/>
@@ -414,7 +395,7 @@
         <a:cs typeface="+mn-cs"/>
       </a:defRPr>
     </a:lvl1pPr>
-    <a:lvl2pPr marL="457200" algn="l" defTabSz="914400" rtl="0" eaLnBrk="1" latinLnBrk="0" hangingPunct="1">
+    <a:lvl2pPr marL="457200" algn="l" defTabSz="457200" rtl="0" eaLnBrk="1" latinLnBrk="0" hangingPunct="1">
       <a:defRPr sz="1200" kern="1200">
         <a:solidFill>
           <a:schemeClr val="tx1"/>
@@ -424,7 +405,7 @@
         <a:cs typeface="+mn-cs"/>
       </a:defRPr>
     </a:lvl2pPr>
-    <a:lvl3pPr marL="914400" algn="l" defTabSz="914400" rtl="0" eaLnBrk="1" latinLnBrk="0" hangingPunct="1">
+    <a:lvl3pPr marL="914400" algn="l" defTabSz="457200" rtl="0" eaLnBrk="1" latinLnBrk="0" hangingPunct="1">
       <a:defRPr sz="1200" kern="1200">
         <a:solidFill>
           <a:schemeClr val="tx1"/>
@@ -434,7 +415,7 @@
         <a:cs typeface="+mn-cs"/>
       </a:defRPr>
     </a:lvl3pPr>
-    <a:lvl4pPr marL="1371600" algn="l" defTabSz="914400" rtl="0" eaLnBrk="1" latinLnBrk="0" hangingPunct="1">
+    <a:lvl4pPr marL="1371600" algn="l" defTabSz="457200" rtl="0" eaLnBrk="1" latinLnBrk="0" hangingPunct="1">
       <a:defRPr sz="1200" kern="1200">
         <a:solidFill>
           <a:schemeClr val="tx1"/>
@@ -444,7 +425,7 @@
         <a:cs typeface="+mn-cs"/>
       </a:defRPr>
     </a:lvl4pPr>
-    <a:lvl5pPr marL="1828800" algn="l" defTabSz="914400" rtl="0" eaLnBrk="1" latinLnBrk="0" hangingPunct="1">
+    <a:lvl5pPr marL="1828800" algn="l" defTabSz="457200" rtl="0" eaLnBrk="1" latinLnBrk="0" hangingPunct="1">
       <a:defRPr sz="1200" kern="1200">
         <a:solidFill>
           <a:schemeClr val="tx1"/>
@@ -454,7 +435,7 @@
         <a:cs typeface="+mn-cs"/>
       </a:defRPr>
     </a:lvl5pPr>
-    <a:lvl6pPr marL="2286000" algn="l" defTabSz="914400" rtl="0" eaLnBrk="1" latinLnBrk="0" hangingPunct="1">
+    <a:lvl6pPr marL="2286000" algn="l" defTabSz="457200" rtl="0" eaLnBrk="1" latinLnBrk="0" hangingPunct="1">
       <a:defRPr sz="1200" kern="1200">
         <a:solidFill>
           <a:schemeClr val="tx1"/>
@@ -464,7 +445,7 @@
         <a:cs typeface="+mn-cs"/>
       </a:defRPr>
     </a:lvl6pPr>
-    <a:lvl7pPr marL="2743200" algn="l" defTabSz="914400" rtl="0" eaLnBrk="1" latinLnBrk="0" hangingPunct="1">
+    <a:lvl7pPr marL="2743200" algn="l" defTabSz="457200" rtl="0" eaLnBrk="1" latinLnBrk="0" hangingPunct="1">
       <a:defRPr sz="1200" kern="1200">
         <a:solidFill>
           <a:schemeClr val="tx1"/>
@@ -474,7 +455,7 @@
         <a:cs typeface="+mn-cs"/>
       </a:defRPr>
     </a:lvl7pPr>
-    <a:lvl8pPr marL="3200400" algn="l" defTabSz="914400" rtl="0" eaLnBrk="1" latinLnBrk="0" hangingPunct="1">
+    <a:lvl8pPr marL="3200400" algn="l" defTabSz="457200" rtl="0" eaLnBrk="1" latinLnBrk="0" hangingPunct="1">
       <a:defRPr sz="1200" kern="1200">
         <a:solidFill>
           <a:schemeClr val="tx1"/>
@@ -484,7 +465,7 @@
         <a:cs typeface="+mn-cs"/>
       </a:defRPr>
     </a:lvl8pPr>
-    <a:lvl9pPr marL="3657600" algn="l" defTabSz="914400" rtl="0" eaLnBrk="1" latinLnBrk="0" hangingPunct="1">
+    <a:lvl9pPr marL="3657600" algn="l" defTabSz="457200" rtl="0" eaLnBrk="1" latinLnBrk="0" hangingPunct="1">
       <a:defRPr sz="1200" kern="1200">
         <a:solidFill>
           <a:schemeClr val="tx1"/>
@@ -499,7 +480,7 @@
 </file>
 
 <file path=ppt/notesSlides/notesSlide1.xml><?xml version="1.0" encoding="utf-8"?>
-<p:notes xmlns:a="http://schemas.openxmlformats.org/drawingml/2006/main" xmlns:r="http://schemas.openxmlformats.org/officeDocument/2006/relationships" xmlns:p="http://schemas.openxmlformats.org/presentationml/2006/main">
+<p:notes xmlns:a="http://schemas.openxmlformats.org/drawingml/2006/main" xmlns:p="http://schemas.openxmlformats.org/presentationml/2006/main" xmlns:r="http://schemas.openxmlformats.org/officeDocument/2006/relationships">
   <p:cSld>
     <p:spTree>
       <p:nvGrpSpPr>
@@ -519,7 +500,7 @@
         <p:nvSpPr>
           <p:cNvPr id="2" name="Slide Image Placeholder 1"/>
           <p:cNvSpPr>
-            <a:spLocks noGrp="1" noRot="1" noChangeAspect="1"/>
+            <a:spLocks noGrp="1"/>
           </p:cNvSpPr>
           <p:nvPr>
             <p:ph type="sldImg" idx="2"/>
@@ -534,7 +515,7 @@
             <a:spLocks noGrp="1"/>
           </p:cNvSpPr>
           <p:nvPr>
-            <p:ph type="body" sz="quarter" idx="3"/>
+            <p:ph type="body" idx="3" sz="quarter"/>
           </p:nvPr>
         </p:nvSpPr>
         <p:spPr/>
@@ -608,7 +589,7 @@
           </a:p>
           <a:p>
             <a:r>
-              <a:t>UoC/AT1 tie: the whole Topic prepares AT1 Part B (board presentation, criteria B1–B9); today</a:t>
+              <a:t>UoC/AT1 tie: the whole Topic prepares AT1 Part B (board presentation, criteria B1–B8); today</a:t>
             </a:r>
           </a:p>
           <a:p>
@@ -625,7 +606,7 @@
             <a:spLocks noGrp="1"/>
           </p:cNvSpPr>
           <p:nvPr>
-            <p:ph type="sldNum" sz="quarter" idx="5"/>
+            <p:ph type="sldNum" idx="5" sz="quarter"/>
           </p:nvPr>
         </p:nvSpPr>
         <p:spPr/>
@@ -639,7 +620,7 @@
 </file>
 
 <file path=ppt/notesSlides/notesSlide10.xml><?xml version="1.0" encoding="utf-8"?>
-<p:notes xmlns:a="http://schemas.openxmlformats.org/drawingml/2006/main" xmlns:r="http://schemas.openxmlformats.org/officeDocument/2006/relationships" xmlns:p="http://schemas.openxmlformats.org/presentationml/2006/main">
+<p:notes xmlns:a="http://schemas.openxmlformats.org/drawingml/2006/main" xmlns:p="http://schemas.openxmlformats.org/presentationml/2006/main" xmlns:r="http://schemas.openxmlformats.org/officeDocument/2006/relationships">
   <p:cSld>
     <p:spTree>
       <p:nvGrpSpPr>
@@ -659,7 +640,7 @@
         <p:nvSpPr>
           <p:cNvPr id="2" name="Slide Image Placeholder 1"/>
           <p:cNvSpPr>
-            <a:spLocks noGrp="1" noRot="1" noChangeAspect="1"/>
+            <a:spLocks noGrp="1"/>
           </p:cNvSpPr>
           <p:nvPr>
             <p:ph type="sldImg" idx="2"/>
@@ -674,7 +655,7 @@
             <a:spLocks noGrp="1"/>
           </p:cNvSpPr>
           <p:nvPr>
-            <p:ph type="body" sz="quarter" idx="3"/>
+            <p:ph type="body" idx="3" sz="quarter"/>
           </p:nvPr>
         </p:nvSpPr>
         <p:spPr/>
@@ -775,7 +756,7 @@
             <a:spLocks noGrp="1"/>
           </p:cNvSpPr>
           <p:nvPr>
-            <p:ph type="sldNum" sz="quarter" idx="5"/>
+            <p:ph type="sldNum" idx="5" sz="quarter"/>
           </p:nvPr>
         </p:nvSpPr>
         <p:spPr/>
@@ -789,7 +770,7 @@
 </file>
 
 <file path=ppt/notesSlides/notesSlide11.xml><?xml version="1.0" encoding="utf-8"?>
-<p:notes xmlns:a="http://schemas.openxmlformats.org/drawingml/2006/main" xmlns:r="http://schemas.openxmlformats.org/officeDocument/2006/relationships" xmlns:p="http://schemas.openxmlformats.org/presentationml/2006/main">
+<p:notes xmlns:a="http://schemas.openxmlformats.org/drawingml/2006/main" xmlns:p="http://schemas.openxmlformats.org/presentationml/2006/main" xmlns:r="http://schemas.openxmlformats.org/officeDocument/2006/relationships">
   <p:cSld>
     <p:spTree>
       <p:nvGrpSpPr>
@@ -809,7 +790,7 @@
         <p:nvSpPr>
           <p:cNvPr id="2" name="Slide Image Placeholder 1"/>
           <p:cNvSpPr>
-            <a:spLocks noGrp="1" noRot="1" noChangeAspect="1"/>
+            <a:spLocks noGrp="1"/>
           </p:cNvSpPr>
           <p:nvPr>
             <p:ph type="sldImg" idx="2"/>
@@ -824,7 +805,7 @@
             <a:spLocks noGrp="1"/>
           </p:cNvSpPr>
           <p:nvPr>
-            <p:ph type="body" sz="quarter" idx="3"/>
+            <p:ph type="body" idx="3" sz="quarter"/>
           </p:nvPr>
         </p:nvSpPr>
         <p:spPr/>
@@ -893,7 +874,7 @@
           </a:p>
           <a:p>
             <a:r>
-              <a:t>UoC/AT1 tie: 502 FS Oral communication → B9 (articulate complex concepts under questioning); Q&amp;A</a:t>
+              <a:t>UoC/AT1 tie: 502 FS Oral communication → B8 (articulate complex concepts under questioning); Q&amp;A</a:t>
             </a:r>
           </a:p>
           <a:p>
@@ -910,7 +891,7 @@
             <a:spLocks noGrp="1"/>
           </p:cNvSpPr>
           <p:nvPr>
-            <p:ph type="sldNum" sz="quarter" idx="5"/>
+            <p:ph type="sldNum" idx="5" sz="quarter"/>
           </p:nvPr>
         </p:nvSpPr>
         <p:spPr/>
@@ -924,7 +905,7 @@
 </file>
 
 <file path=ppt/notesSlides/notesSlide12.xml><?xml version="1.0" encoding="utf-8"?>
-<p:notes xmlns:a="http://schemas.openxmlformats.org/drawingml/2006/main" xmlns:r="http://schemas.openxmlformats.org/officeDocument/2006/relationships" xmlns:p="http://schemas.openxmlformats.org/presentationml/2006/main">
+<p:notes xmlns:a="http://schemas.openxmlformats.org/drawingml/2006/main" xmlns:p="http://schemas.openxmlformats.org/presentationml/2006/main" xmlns:r="http://schemas.openxmlformats.org/officeDocument/2006/relationships">
   <p:cSld>
     <p:spTree>
       <p:nvGrpSpPr>
@@ -944,7 +925,7 @@
         <p:nvSpPr>
           <p:cNvPr id="2" name="Slide Image Placeholder 1"/>
           <p:cNvSpPr>
-            <a:spLocks noGrp="1" noRot="1" noChangeAspect="1"/>
+            <a:spLocks noGrp="1"/>
           </p:cNvSpPr>
           <p:nvPr>
             <p:ph type="sldImg" idx="2"/>
@@ -959,7 +940,7 @@
             <a:spLocks noGrp="1"/>
           </p:cNvSpPr>
           <p:nvPr>
-            <p:ph type="body" sz="quarter" idx="3"/>
+            <p:ph type="body" idx="3" sz="quarter"/>
           </p:nvPr>
         </p:nvSpPr>
         <p:spPr/>
@@ -1033,7 +1014,7 @@
           </a:p>
           <a:p>
             <a:r>
-              <a:t>and 502 FS → B9; the listen-clarify-answer-check loop is exactly what B8/B9 assess.</a:t>
+              <a:t>and 502 FS → B8; the listen-clarify-answer-check loop is exactly what B8 assess.</a:t>
             </a:r>
           </a:p>
         </p:txBody>
@@ -1045,7 +1026,7 @@
             <a:spLocks noGrp="1"/>
           </p:cNvSpPr>
           <p:nvPr>
-            <p:ph type="sldNum" sz="quarter" idx="5"/>
+            <p:ph type="sldNum" idx="5" sz="quarter"/>
           </p:nvPr>
         </p:nvSpPr>
         <p:spPr/>
@@ -1059,7 +1040,7 @@
 </file>
 
 <file path=ppt/notesSlides/notesSlide13.xml><?xml version="1.0" encoding="utf-8"?>
-<p:notes xmlns:a="http://schemas.openxmlformats.org/drawingml/2006/main" xmlns:r="http://schemas.openxmlformats.org/officeDocument/2006/relationships" xmlns:p="http://schemas.openxmlformats.org/presentationml/2006/main">
+<p:notes xmlns:a="http://schemas.openxmlformats.org/drawingml/2006/main" xmlns:p="http://schemas.openxmlformats.org/presentationml/2006/main" xmlns:r="http://schemas.openxmlformats.org/officeDocument/2006/relationships">
   <p:cSld>
     <p:spTree>
       <p:nvGrpSpPr>
@@ -1079,7 +1060,7 @@
         <p:nvSpPr>
           <p:cNvPr id="2" name="Slide Image Placeholder 1"/>
           <p:cNvSpPr>
-            <a:spLocks noGrp="1" noRot="1" noChangeAspect="1"/>
+            <a:spLocks noGrp="1"/>
           </p:cNvSpPr>
           <p:nvPr>
             <p:ph type="sldImg" idx="2"/>
@@ -1094,7 +1075,7 @@
             <a:spLocks noGrp="1"/>
           </p:cNvSpPr>
           <p:nvPr>
-            <p:ph type="body" sz="quarter" idx="3"/>
+            <p:ph type="body" idx="3" sz="quarter"/>
           </p:nvPr>
         </p:nvSpPr>
         <p:spPr/>
@@ -1173,7 +1154,7 @@
           </a:p>
           <a:p>
             <a:r>
-              <a:t>UoC/AT1 tie: defends the probed knowledge (517 PC 1.1–3.2, 401 KE 1/3, 502 PC 1.1/1.2) → B8/B9;</a:t>
+              <a:t>UoC/AT1 tie: defends the probed knowledge (517 PC 1.1–3.2, 401 KE 1/3, 502 PC 1.1/1.2) → B8;</a:t>
             </a:r>
           </a:p>
           <a:p>
@@ -1190,7 +1171,7 @@
             <a:spLocks noGrp="1"/>
           </p:cNvSpPr>
           <p:nvPr>
-            <p:ph type="sldNum" sz="quarter" idx="5"/>
+            <p:ph type="sldNum" idx="5" sz="quarter"/>
           </p:nvPr>
         </p:nvSpPr>
         <p:spPr/>
@@ -1204,7 +1185,7 @@
 </file>
 
 <file path=ppt/notesSlides/notesSlide14.xml><?xml version="1.0" encoding="utf-8"?>
-<p:notes xmlns:a="http://schemas.openxmlformats.org/drawingml/2006/main" xmlns:r="http://schemas.openxmlformats.org/officeDocument/2006/relationships" xmlns:p="http://schemas.openxmlformats.org/presentationml/2006/main">
+<p:notes xmlns:a="http://schemas.openxmlformats.org/drawingml/2006/main" xmlns:p="http://schemas.openxmlformats.org/presentationml/2006/main" xmlns:r="http://schemas.openxmlformats.org/officeDocument/2006/relationships">
   <p:cSld>
     <p:spTree>
       <p:nvGrpSpPr>
@@ -1224,7 +1205,7 @@
         <p:nvSpPr>
           <p:cNvPr id="2" name="Slide Image Placeholder 1"/>
           <p:cNvSpPr>
-            <a:spLocks noGrp="1" noRot="1" noChangeAspect="1"/>
+            <a:spLocks noGrp="1"/>
           </p:cNvSpPr>
           <p:nvPr>
             <p:ph type="sldImg" idx="2"/>
@@ -1239,7 +1220,7 @@
             <a:spLocks noGrp="1"/>
           </p:cNvSpPr>
           <p:nvPr>
-            <p:ph type="body" sz="quarter" idx="3"/>
+            <p:ph type="body" idx="3" sz="quarter"/>
           </p:nvPr>
         </p:nvSpPr>
         <p:spPr/>
@@ -1263,7 +1244,7 @@
           </a:p>
           <a:p>
             <a:r>
-              <a:t>understood it — reflect it back); CAPTURE it in the Feedback Record; OBTAIN the board's sign-off</a:t>
+              <a:t>understood it — reflect it back); CAPTURE it in the Business Case's Feedback section (§11); OBTAIN the board's sign-off</a:t>
             </a:r>
           </a:p>
           <a:p>
@@ -1325,7 +1306,7 @@
             <a:spLocks noGrp="1"/>
           </p:cNvSpPr>
           <p:nvPr>
-            <p:ph type="sldNum" sz="quarter" idx="5"/>
+            <p:ph type="sldNum" idx="5" sz="quarter"/>
           </p:nvPr>
         </p:nvSpPr>
         <p:spPr/>
@@ -1339,7 +1320,7 @@
 </file>
 
 <file path=ppt/notesSlides/notesSlide15.xml><?xml version="1.0" encoding="utf-8"?>
-<p:notes xmlns:a="http://schemas.openxmlformats.org/drawingml/2006/main" xmlns:r="http://schemas.openxmlformats.org/officeDocument/2006/relationships" xmlns:p="http://schemas.openxmlformats.org/presentationml/2006/main">
+<p:notes xmlns:a="http://schemas.openxmlformats.org/drawingml/2006/main" xmlns:p="http://schemas.openxmlformats.org/presentationml/2006/main" xmlns:r="http://schemas.openxmlformats.org/officeDocument/2006/relationships">
   <p:cSld>
     <p:spTree>
       <p:nvGrpSpPr>
@@ -1359,7 +1340,7 @@
         <p:nvSpPr>
           <p:cNvPr id="2" name="Slide Image Placeholder 1"/>
           <p:cNvSpPr>
-            <a:spLocks noGrp="1" noRot="1" noChangeAspect="1"/>
+            <a:spLocks noGrp="1"/>
           </p:cNvSpPr>
           <p:nvPr>
             <p:ph type="sldImg" idx="2"/>
@@ -1374,7 +1355,7 @@
             <a:spLocks noGrp="1"/>
           </p:cNvSpPr>
           <p:nvPr>
-            <p:ph type="body" sz="quarter" idx="3"/>
+            <p:ph type="body" idx="3" sz="quarter"/>
           </p:nvPr>
         </p:nvSpPr>
         <p:spPr/>
@@ -1423,7 +1404,7 @@
           </a:p>
           <a:p>
             <a:r>
-              <a:t>Feedback Record → obtain the sign-off.</a:t>
+              <a:t>Business Case's Feedback section (§11) → obtain the sign-off.</a:t>
             </a:r>
           </a:p>
           <a:p>
@@ -1475,7 +1456,7 @@
             <a:spLocks noGrp="1"/>
           </p:cNvSpPr>
           <p:nvPr>
-            <p:ph type="sldNum" sz="quarter" idx="5"/>
+            <p:ph type="sldNum" idx="5" sz="quarter"/>
           </p:nvPr>
         </p:nvSpPr>
         <p:spPr/>
@@ -1489,7 +1470,7 @@
 </file>
 
 <file path=ppt/notesSlides/notesSlide2.xml><?xml version="1.0" encoding="utf-8"?>
-<p:notes xmlns:a="http://schemas.openxmlformats.org/drawingml/2006/main" xmlns:r="http://schemas.openxmlformats.org/officeDocument/2006/relationships" xmlns:p="http://schemas.openxmlformats.org/presentationml/2006/main">
+<p:notes xmlns:a="http://schemas.openxmlformats.org/drawingml/2006/main" xmlns:p="http://schemas.openxmlformats.org/presentationml/2006/main" xmlns:r="http://schemas.openxmlformats.org/officeDocument/2006/relationships">
   <p:cSld>
     <p:spTree>
       <p:nvGrpSpPr>
@@ -1509,7 +1490,7 @@
         <p:nvSpPr>
           <p:cNvPr id="2" name="Slide Image Placeholder 1"/>
           <p:cNvSpPr>
-            <a:spLocks noGrp="1" noRot="1" noChangeAspect="1"/>
+            <a:spLocks noGrp="1"/>
           </p:cNvSpPr>
           <p:nvPr>
             <p:ph type="sldImg" idx="2"/>
@@ -1524,7 +1505,7 @@
             <a:spLocks noGrp="1"/>
           </p:cNvSpPr>
           <p:nvPr>
-            <p:ph type="body" sz="quarter" idx="3"/>
+            <p:ph type="body" idx="3" sz="quarter"/>
           </p:nvPr>
         </p:nvSpPr>
         <p:spPr/>
@@ -1563,7 +1544,7 @@
           </a:p>
           <a:p>
             <a:r>
-              <a:t>• The format target (bolded): 8–10 slides, one section each, with speaker notes, on the YAT Board</a:t>
+              <a:t>• The format target (bolded): 8–10 slides, one section each, on the YAT Board</a:t>
             </a:r>
           </a:p>
           <a:p>
@@ -1610,7 +1591,7 @@
             <a:spLocks noGrp="1"/>
           </p:cNvSpPr>
           <p:nvPr>
-            <p:ph type="sldNum" sz="quarter" idx="5"/>
+            <p:ph type="sldNum" idx="5" sz="quarter"/>
           </p:nvPr>
         </p:nvSpPr>
         <p:spPr/>
@@ -1624,7 +1605,7 @@
 </file>
 
 <file path=ppt/notesSlides/notesSlide3.xml><?xml version="1.0" encoding="utf-8"?>
-<p:notes xmlns:a="http://schemas.openxmlformats.org/drawingml/2006/main" xmlns:r="http://schemas.openxmlformats.org/officeDocument/2006/relationships" xmlns:p="http://schemas.openxmlformats.org/presentationml/2006/main">
+<p:notes xmlns:a="http://schemas.openxmlformats.org/drawingml/2006/main" xmlns:p="http://schemas.openxmlformats.org/presentationml/2006/main" xmlns:r="http://schemas.openxmlformats.org/officeDocument/2006/relationships">
   <p:cSld>
     <p:spTree>
       <p:nvGrpSpPr>
@@ -1644,7 +1625,7 @@
         <p:nvSpPr>
           <p:cNvPr id="2" name="Slide Image Placeholder 1"/>
           <p:cNvSpPr>
-            <a:spLocks noGrp="1" noRot="1" noChangeAspect="1"/>
+            <a:spLocks noGrp="1"/>
           </p:cNvSpPr>
           <p:nvPr>
             <p:ph type="sldImg" idx="2"/>
@@ -1659,7 +1640,7 @@
             <a:spLocks noGrp="1"/>
           </p:cNvSpPr>
           <p:nvPr>
-            <p:ph type="body" sz="quarter" idx="3"/>
+            <p:ph type="body" idx="3" sz="quarter"/>
           </p:nvPr>
         </p:nvSpPr>
         <p:spPr/>
@@ -1745,7 +1726,7 @@
             <a:spLocks noGrp="1"/>
           </p:cNvSpPr>
           <p:nvPr>
-            <p:ph type="sldNum" sz="quarter" idx="5"/>
+            <p:ph type="sldNum" idx="5" sz="quarter"/>
           </p:nvPr>
         </p:nvSpPr>
         <p:spPr/>
@@ -1759,7 +1740,7 @@
 </file>
 
 <file path=ppt/notesSlides/notesSlide4.xml><?xml version="1.0" encoding="utf-8"?>
-<p:notes xmlns:a="http://schemas.openxmlformats.org/drawingml/2006/main" xmlns:r="http://schemas.openxmlformats.org/officeDocument/2006/relationships" xmlns:p="http://schemas.openxmlformats.org/presentationml/2006/main">
+<p:notes xmlns:a="http://schemas.openxmlformats.org/drawingml/2006/main" xmlns:p="http://schemas.openxmlformats.org/presentationml/2006/main" xmlns:r="http://schemas.openxmlformats.org/officeDocument/2006/relationships">
   <p:cSld>
     <p:spTree>
       <p:nvGrpSpPr>
@@ -1779,7 +1760,7 @@
         <p:nvSpPr>
           <p:cNvPr id="2" name="Slide Image Placeholder 1"/>
           <p:cNvSpPr>
-            <a:spLocks noGrp="1" noRot="1" noChangeAspect="1"/>
+            <a:spLocks noGrp="1"/>
           </p:cNvSpPr>
           <p:nvPr>
             <p:ph type="sldImg" idx="2"/>
@@ -1794,7 +1775,7 @@
             <a:spLocks noGrp="1"/>
           </p:cNvSpPr>
           <p:nvPr>
-            <p:ph type="body" sz="quarter" idx="3"/>
+            <p:ph type="body" idx="3" sz="quarter"/>
           </p:nvPr>
         </p:nvSpPr>
         <p:spPr/>
@@ -1875,7 +1856,7 @@
             <a:spLocks noGrp="1"/>
           </p:cNvSpPr>
           <p:nvPr>
-            <p:ph type="sldNum" sz="quarter" idx="5"/>
+            <p:ph type="sldNum" idx="5" sz="quarter"/>
           </p:nvPr>
         </p:nvSpPr>
         <p:spPr/>
@@ -1889,7 +1870,7 @@
 </file>
 
 <file path=ppt/notesSlides/notesSlide5.xml><?xml version="1.0" encoding="utf-8"?>
-<p:notes xmlns:a="http://schemas.openxmlformats.org/drawingml/2006/main" xmlns:r="http://schemas.openxmlformats.org/officeDocument/2006/relationships" xmlns:p="http://schemas.openxmlformats.org/presentationml/2006/main">
+<p:notes xmlns:a="http://schemas.openxmlformats.org/drawingml/2006/main" xmlns:p="http://schemas.openxmlformats.org/presentationml/2006/main" xmlns:r="http://schemas.openxmlformats.org/officeDocument/2006/relationships">
   <p:cSld>
     <p:spTree>
       <p:nvGrpSpPr>
@@ -1909,7 +1890,7 @@
         <p:nvSpPr>
           <p:cNvPr id="2" name="Slide Image Placeholder 1"/>
           <p:cNvSpPr>
-            <a:spLocks noGrp="1" noRot="1" noChangeAspect="1"/>
+            <a:spLocks noGrp="1"/>
           </p:cNvSpPr>
           <p:nvPr>
             <p:ph type="sldImg" idx="2"/>
@@ -1924,7 +1905,7 @@
             <a:spLocks noGrp="1"/>
           </p:cNvSpPr>
           <p:nvPr>
-            <p:ph type="body" sz="quarter" idx="3"/>
+            <p:ph type="body" idx="3" sz="quarter"/>
           </p:nvPr>
         </p:nvSpPr>
         <p:spPr/>
@@ -2015,7 +1996,7 @@
             <a:spLocks noGrp="1"/>
           </p:cNvSpPr>
           <p:nvPr>
-            <p:ph type="sldNum" sz="quarter" idx="5"/>
+            <p:ph type="sldNum" idx="5" sz="quarter"/>
           </p:nvPr>
         </p:nvSpPr>
         <p:spPr/>
@@ -2029,7 +2010,7 @@
 </file>
 
 <file path=ppt/notesSlides/notesSlide6.xml><?xml version="1.0" encoding="utf-8"?>
-<p:notes xmlns:a="http://schemas.openxmlformats.org/drawingml/2006/main" xmlns:r="http://schemas.openxmlformats.org/officeDocument/2006/relationships" xmlns:p="http://schemas.openxmlformats.org/presentationml/2006/main">
+<p:notes xmlns:a="http://schemas.openxmlformats.org/drawingml/2006/main" xmlns:p="http://schemas.openxmlformats.org/presentationml/2006/main" xmlns:r="http://schemas.openxmlformats.org/officeDocument/2006/relationships">
   <p:cSld>
     <p:spTree>
       <p:nvGrpSpPr>
@@ -2049,7 +2030,7 @@
         <p:nvSpPr>
           <p:cNvPr id="2" name="Slide Image Placeholder 1"/>
           <p:cNvSpPr>
-            <a:spLocks noGrp="1" noRot="1" noChangeAspect="1"/>
+            <a:spLocks noGrp="1"/>
           </p:cNvSpPr>
           <p:nvPr>
             <p:ph type="sldImg" idx="2"/>
@@ -2064,7 +2045,7 @@
             <a:spLocks noGrp="1"/>
           </p:cNvSpPr>
           <p:nvPr>
-            <p:ph type="body" sz="quarter" idx="3"/>
+            <p:ph type="body" idx="3" sz="quarter"/>
           </p:nvPr>
         </p:nvSpPr>
         <p:spPr/>
@@ -2088,12 +2069,12 @@
           </a:p>
           <a:p>
             <a:r>
-              <a:t>and turn it into a board deck. Eight to ten slides on the YAT Board Presentation Deck template,</a:t>
-            </a:r>
-          </a:p>
-          <a:p>
-            <a:r>
-              <a:t>with speaker notes. Then rehearse it — out loud, to time. A deck you haven't said aloud isn't</a:t>
+              <a:t>and turn it into a board deck. Eight to ten slides on the YAT Board Presentation Deck template.</a:t>
+            </a:r>
+          </a:p>
+          <a:p>
+            <a:r>
+              <a:t>Then rehearse it — out loud, to time. A deck you haven't said aloud isn't</a:t>
             </a:r>
           </a:p>
           <a:p>
@@ -2128,7 +2109,7 @@
           </a:p>
           <a:p>
             <a:r>
-              <a:t>Must produce: an 8–10 slide board deck with speaker notes, rehearsed and timed, plus three</a:t>
+              <a:t>Must produce: an 8–10 slide board deck, rehearsed and timed, plus three</a:t>
             </a:r>
           </a:p>
           <a:p>
@@ -2175,7 +2156,7 @@
             <a:spLocks noGrp="1"/>
           </p:cNvSpPr>
           <p:nvPr>
-            <p:ph type="sldNum" sz="quarter" idx="5"/>
+            <p:ph type="sldNum" idx="5" sz="quarter"/>
           </p:nvPr>
         </p:nvSpPr>
         <p:spPr/>
@@ -2189,7 +2170,7 @@
 </file>
 
 <file path=ppt/notesSlides/notesSlide7.xml><?xml version="1.0" encoding="utf-8"?>
-<p:notes xmlns:a="http://schemas.openxmlformats.org/drawingml/2006/main" xmlns:r="http://schemas.openxmlformats.org/officeDocument/2006/relationships" xmlns:p="http://schemas.openxmlformats.org/presentationml/2006/main">
+<p:notes xmlns:a="http://schemas.openxmlformats.org/drawingml/2006/main" xmlns:p="http://schemas.openxmlformats.org/presentationml/2006/main" xmlns:r="http://schemas.openxmlformats.org/officeDocument/2006/relationships">
   <p:cSld>
     <p:spTree>
       <p:nvGrpSpPr>
@@ -2209,7 +2190,7 @@
         <p:nvSpPr>
           <p:cNvPr id="2" name="Slide Image Placeholder 1"/>
           <p:cNvSpPr>
-            <a:spLocks noGrp="1" noRot="1" noChangeAspect="1"/>
+            <a:spLocks noGrp="1"/>
           </p:cNvSpPr>
           <p:nvPr>
             <p:ph type="sldImg" idx="2"/>
@@ -2224,7 +2205,7 @@
             <a:spLocks noGrp="1"/>
           </p:cNvSpPr>
           <p:nvPr>
-            <p:ph type="body" sz="quarter" idx="3"/>
+            <p:ph type="body" idx="3" sz="quarter"/>
           </p:nvPr>
         </p:nvSpPr>
         <p:spPr/>
@@ -2305,7 +2286,7 @@
             <a:spLocks noGrp="1"/>
           </p:cNvSpPr>
           <p:nvPr>
-            <p:ph type="sldNum" sz="quarter" idx="5"/>
+            <p:ph type="sldNum" idx="5" sz="quarter"/>
           </p:nvPr>
         </p:nvSpPr>
         <p:spPr/>
@@ -2319,7 +2300,7 @@
 </file>
 
 <file path=ppt/notesSlides/notesSlide8.xml><?xml version="1.0" encoding="utf-8"?>
-<p:notes xmlns:a="http://schemas.openxmlformats.org/drawingml/2006/main" xmlns:r="http://schemas.openxmlformats.org/officeDocument/2006/relationships" xmlns:p="http://schemas.openxmlformats.org/presentationml/2006/main">
+<p:notes xmlns:a="http://schemas.openxmlformats.org/drawingml/2006/main" xmlns:p="http://schemas.openxmlformats.org/presentationml/2006/main" xmlns:r="http://schemas.openxmlformats.org/officeDocument/2006/relationships">
   <p:cSld>
     <p:spTree>
       <p:nvGrpSpPr>
@@ -2339,7 +2320,7 @@
         <p:nvSpPr>
           <p:cNvPr id="2" name="Slide Image Placeholder 1"/>
           <p:cNvSpPr>
-            <a:spLocks noGrp="1" noRot="1" noChangeAspect="1"/>
+            <a:spLocks noGrp="1"/>
           </p:cNvSpPr>
           <p:nvPr>
             <p:ph type="sldImg" idx="2"/>
@@ -2354,7 +2335,7 @@
             <a:spLocks noGrp="1"/>
           </p:cNvSpPr>
           <p:nvPr>
-            <p:ph type="body" sz="quarter" idx="3"/>
+            <p:ph type="body" idx="3" sz="quarter"/>
           </p:nvPr>
         </p:nvSpPr>
         <p:spPr/>
@@ -2445,7 +2426,7 @@
             <a:spLocks noGrp="1"/>
           </p:cNvSpPr>
           <p:nvPr>
-            <p:ph type="sldNum" sz="quarter" idx="5"/>
+            <p:ph type="sldNum" idx="5" sz="quarter"/>
           </p:nvPr>
         </p:nvSpPr>
         <p:spPr/>
@@ -2459,7 +2440,7 @@
 </file>
 
 <file path=ppt/notesSlides/notesSlide9.xml><?xml version="1.0" encoding="utf-8"?>
-<p:notes xmlns:a="http://schemas.openxmlformats.org/drawingml/2006/main" xmlns:r="http://schemas.openxmlformats.org/officeDocument/2006/relationships" xmlns:p="http://schemas.openxmlformats.org/presentationml/2006/main">
+<p:notes xmlns:a="http://schemas.openxmlformats.org/drawingml/2006/main" xmlns:p="http://schemas.openxmlformats.org/presentationml/2006/main" xmlns:r="http://schemas.openxmlformats.org/officeDocument/2006/relationships">
   <p:cSld>
     <p:spTree>
       <p:nvGrpSpPr>
@@ -2479,7 +2460,7 @@
         <p:nvSpPr>
           <p:cNvPr id="2" name="Slide Image Placeholder 1"/>
           <p:cNvSpPr>
-            <a:spLocks noGrp="1" noRot="1" noChangeAspect="1"/>
+            <a:spLocks noGrp="1"/>
           </p:cNvSpPr>
           <p:nvPr>
             <p:ph type="sldImg" idx="2"/>
@@ -2494,7 +2475,7 @@
             <a:spLocks noGrp="1"/>
           </p:cNvSpPr>
           <p:nvPr>
-            <p:ph type="body" sz="quarter" idx="3"/>
+            <p:ph type="body" idx="3" sz="quarter"/>
           </p:nvPr>
         </p:nvSpPr>
         <p:spPr/>
@@ -2503,7 +2484,7 @@
           <a:lstStyle/>
           <a:p>
             <a:r>
-              <a:t>Teach the plain-English skill — the coverage spec calls this out explicitly (B7/B9). The audience</a:t>
+              <a:t>Teach the plain-English skill — the coverage spec calls this out explicitly (B7/B8). The audience</a:t>
             </a:r>
           </a:p>
           <a:p>
@@ -2573,7 +2554,7 @@
           </a:p>
           <a:p>
             <a:r>
-              <a:t>UoC/AT1 tie: 517 FS Oral Communication → B7 and 502 FS Oral communication → B9 — plain English and</a:t>
+              <a:t>UoC/AT1 tie: 517 FS Oral Communication → B7 and 502 FS Oral communication → B8 — plain English and</a:t>
             </a:r>
           </a:p>
           <a:p>
@@ -2590,7 +2571,7 @@
             <a:spLocks noGrp="1"/>
           </p:cNvSpPr>
           <p:nvPr>
-            <p:ph type="sldNum" sz="quarter" idx="5"/>
+            <p:ph type="sldNum" idx="5" sz="quarter"/>
           </p:nvPr>
         </p:nvSpPr>
         <p:spPr/>
@@ -2641,9 +2622,10 @@
           <a:lstStyle/>
           <a:p>
             <a:r>
-              <a:rPr lang="en-US"/>
+              <a:rPr lang="en-US" smtClean="0"/>
               <a:t>Click to edit Master title style</a:t>
             </a:r>
+            <a:endParaRPr lang="en-US"/>
           </a:p>
         </p:txBody>
       </p:sp>
@@ -2759,9 +2741,10 @@
           </a:lstStyle>
           <a:p>
             <a:r>
-              <a:rPr lang="en-US"/>
+              <a:rPr lang="en-US" smtClean="0"/>
               <a:t>Click to edit Master subtitle style</a:t>
             </a:r>
+            <a:endParaRPr lang="en-US"/>
           </a:p>
         </p:txBody>
       </p:sp>
@@ -2782,7 +2765,7 @@
           <a:p>
             <a:fld id="{5BCAD085-E8A6-8845-BD4E-CB4CCA059FC4}" type="datetimeFigureOut">
               <a:rPr lang="en-US" smtClean="0"/>
-              <a:t>7/22/26</a:t>
+              <a:t>1/27/13</a:t>
             </a:fld>
             <a:endParaRPr lang="en-US"/>
           </a:p>
@@ -2876,9 +2859,10 @@
           <a:lstStyle/>
           <a:p>
             <a:r>
-              <a:rPr lang="en-US"/>
+              <a:rPr lang="en-US" smtClean="0"/>
               <a:t>Click to edit Master title style</a:t>
             </a:r>
+            <a:endParaRPr lang="en-US"/>
           </a:p>
         </p:txBody>
       </p:sp>
@@ -2899,37 +2883,38 @@
           <a:p>
             <a:pPr lvl="0"/>
             <a:r>
-              <a:rPr lang="en-US"/>
+              <a:rPr lang="en-US" smtClean="0"/>
               <a:t>Click to edit Master text styles</a:t>
             </a:r>
           </a:p>
           <a:p>
             <a:pPr lvl="1"/>
             <a:r>
-              <a:rPr lang="en-US"/>
+              <a:rPr lang="en-US" smtClean="0"/>
               <a:t>Second level</a:t>
             </a:r>
           </a:p>
           <a:p>
             <a:pPr lvl="2"/>
             <a:r>
-              <a:rPr lang="en-US"/>
+              <a:rPr lang="en-US" smtClean="0"/>
               <a:t>Third level</a:t>
             </a:r>
           </a:p>
           <a:p>
             <a:pPr lvl="3"/>
             <a:r>
-              <a:rPr lang="en-US"/>
+              <a:rPr lang="en-US" smtClean="0"/>
               <a:t>Fourth level</a:t>
             </a:r>
           </a:p>
           <a:p>
             <a:pPr lvl="4"/>
             <a:r>
-              <a:rPr lang="en-US"/>
+              <a:rPr lang="en-US" smtClean="0"/>
               <a:t>Fifth level</a:t>
             </a:r>
+            <a:endParaRPr lang="en-US"/>
           </a:p>
         </p:txBody>
       </p:sp>
@@ -2950,7 +2935,7 @@
           <a:p>
             <a:fld id="{5BCAD085-E8A6-8845-BD4E-CB4CCA059FC4}" type="datetimeFigureOut">
               <a:rPr lang="en-US" smtClean="0"/>
-              <a:t>7/22/26</a:t>
+              <a:t>1/27/13</a:t>
             </a:fld>
             <a:endParaRPr lang="en-US"/>
           </a:p>
@@ -3049,9 +3034,10 @@
           <a:lstStyle/>
           <a:p>
             <a:r>
-              <a:rPr lang="en-US"/>
+              <a:rPr lang="en-US" smtClean="0"/>
               <a:t>Click to edit Master title style</a:t>
             </a:r>
+            <a:endParaRPr lang="en-US"/>
           </a:p>
         </p:txBody>
       </p:sp>
@@ -3077,37 +3063,38 @@
           <a:p>
             <a:pPr lvl="0"/>
             <a:r>
-              <a:rPr lang="en-US"/>
+              <a:rPr lang="en-US" smtClean="0"/>
               <a:t>Click to edit Master text styles</a:t>
             </a:r>
           </a:p>
           <a:p>
             <a:pPr lvl="1"/>
             <a:r>
-              <a:rPr lang="en-US"/>
+              <a:rPr lang="en-US" smtClean="0"/>
               <a:t>Second level</a:t>
             </a:r>
           </a:p>
           <a:p>
             <a:pPr lvl="2"/>
             <a:r>
-              <a:rPr lang="en-US"/>
+              <a:rPr lang="en-US" smtClean="0"/>
               <a:t>Third level</a:t>
             </a:r>
           </a:p>
           <a:p>
             <a:pPr lvl="3"/>
             <a:r>
-              <a:rPr lang="en-US"/>
+              <a:rPr lang="en-US" smtClean="0"/>
               <a:t>Fourth level</a:t>
             </a:r>
           </a:p>
           <a:p>
             <a:pPr lvl="4"/>
             <a:r>
-              <a:rPr lang="en-US"/>
+              <a:rPr lang="en-US" smtClean="0"/>
               <a:t>Fifth level</a:t>
             </a:r>
+            <a:endParaRPr lang="en-US"/>
           </a:p>
         </p:txBody>
       </p:sp>
@@ -3128,7 +3115,7 @@
           <a:p>
             <a:fld id="{5BCAD085-E8A6-8845-BD4E-CB4CCA059FC4}" type="datetimeFigureOut">
               <a:rPr lang="en-US" smtClean="0"/>
-              <a:t>7/22/26</a:t>
+              <a:t>1/27/13</a:t>
             </a:fld>
             <a:endParaRPr lang="en-US"/>
           </a:p>
@@ -3222,9 +3209,10 @@
           <a:lstStyle/>
           <a:p>
             <a:r>
-              <a:rPr lang="en-US"/>
+              <a:rPr lang="en-US" smtClean="0"/>
               <a:t>Click to edit Master title style</a:t>
             </a:r>
+            <a:endParaRPr lang="en-US"/>
           </a:p>
         </p:txBody>
       </p:sp>
@@ -3245,37 +3233,38 @@
           <a:p>
             <a:pPr lvl="0"/>
             <a:r>
-              <a:rPr lang="en-US"/>
+              <a:rPr lang="en-US" smtClean="0"/>
               <a:t>Click to edit Master text styles</a:t>
             </a:r>
           </a:p>
           <a:p>
             <a:pPr lvl="1"/>
             <a:r>
-              <a:rPr lang="en-US"/>
+              <a:rPr lang="en-US" smtClean="0"/>
               <a:t>Second level</a:t>
             </a:r>
           </a:p>
           <a:p>
             <a:pPr lvl="2"/>
             <a:r>
-              <a:rPr lang="en-US"/>
+              <a:rPr lang="en-US" smtClean="0"/>
               <a:t>Third level</a:t>
             </a:r>
           </a:p>
           <a:p>
             <a:pPr lvl="3"/>
             <a:r>
-              <a:rPr lang="en-US"/>
+              <a:rPr lang="en-US" smtClean="0"/>
               <a:t>Fourth level</a:t>
             </a:r>
           </a:p>
           <a:p>
             <a:pPr lvl="4"/>
             <a:r>
-              <a:rPr lang="en-US"/>
+              <a:rPr lang="en-US" smtClean="0"/>
               <a:t>Fifth level</a:t>
             </a:r>
+            <a:endParaRPr lang="en-US"/>
           </a:p>
         </p:txBody>
       </p:sp>
@@ -3296,7 +3285,7 @@
           <a:p>
             <a:fld id="{5BCAD085-E8A6-8845-BD4E-CB4CCA059FC4}" type="datetimeFigureOut">
               <a:rPr lang="en-US" smtClean="0"/>
-              <a:t>7/22/26</a:t>
+              <a:t>1/27/13</a:t>
             </a:fld>
             <a:endParaRPr lang="en-US"/>
           </a:p>
@@ -3399,9 +3388,10 @@
           </a:lstStyle>
           <a:p>
             <a:r>
-              <a:rPr lang="en-US"/>
+              <a:rPr lang="en-US" smtClean="0"/>
               <a:t>Click to edit Master title style</a:t>
             </a:r>
+            <a:endParaRPr lang="en-US"/>
           </a:p>
         </p:txBody>
       </p:sp>
@@ -3518,7 +3508,7 @@
           <a:p>
             <a:pPr lvl="0"/>
             <a:r>
-              <a:rPr lang="en-US"/>
+              <a:rPr lang="en-US" smtClean="0"/>
               <a:t>Click to edit Master text styles</a:t>
             </a:r>
           </a:p>
@@ -3541,7 +3531,7 @@
           <a:p>
             <a:fld id="{5BCAD085-E8A6-8845-BD4E-CB4CCA059FC4}" type="datetimeFigureOut">
               <a:rPr lang="en-US" smtClean="0"/>
-              <a:t>7/22/26</a:t>
+              <a:t>1/27/13</a:t>
             </a:fld>
             <a:endParaRPr lang="en-US"/>
           </a:p>
@@ -3635,9 +3625,10 @@
           <a:lstStyle/>
           <a:p>
             <a:r>
-              <a:rPr lang="en-US"/>
+              <a:rPr lang="en-US" smtClean="0"/>
               <a:t>Click to edit Master title style</a:t>
             </a:r>
+            <a:endParaRPr lang="en-US"/>
           </a:p>
         </p:txBody>
       </p:sp>
@@ -3691,37 +3682,38 @@
           <a:p>
             <a:pPr lvl="0"/>
             <a:r>
-              <a:rPr lang="en-US"/>
+              <a:rPr lang="en-US" smtClean="0"/>
               <a:t>Click to edit Master text styles</a:t>
             </a:r>
           </a:p>
           <a:p>
             <a:pPr lvl="1"/>
             <a:r>
-              <a:rPr lang="en-US"/>
+              <a:rPr lang="en-US" smtClean="0"/>
               <a:t>Second level</a:t>
             </a:r>
           </a:p>
           <a:p>
             <a:pPr lvl="2"/>
             <a:r>
-              <a:rPr lang="en-US"/>
+              <a:rPr lang="en-US" smtClean="0"/>
               <a:t>Third level</a:t>
             </a:r>
           </a:p>
           <a:p>
             <a:pPr lvl="3"/>
             <a:r>
-              <a:rPr lang="en-US"/>
+              <a:rPr lang="en-US" smtClean="0"/>
               <a:t>Fourth level</a:t>
             </a:r>
           </a:p>
           <a:p>
             <a:pPr lvl="4"/>
             <a:r>
-              <a:rPr lang="en-US"/>
+              <a:rPr lang="en-US" smtClean="0"/>
               <a:t>Fifth level</a:t>
             </a:r>
+            <a:endParaRPr lang="en-US"/>
           </a:p>
         </p:txBody>
       </p:sp>
@@ -3775,37 +3767,38 @@
           <a:p>
             <a:pPr lvl="0"/>
             <a:r>
-              <a:rPr lang="en-US"/>
+              <a:rPr lang="en-US" smtClean="0"/>
               <a:t>Click to edit Master text styles</a:t>
             </a:r>
           </a:p>
           <a:p>
             <a:pPr lvl="1"/>
             <a:r>
-              <a:rPr lang="en-US"/>
+              <a:rPr lang="en-US" smtClean="0"/>
               <a:t>Second level</a:t>
             </a:r>
           </a:p>
           <a:p>
             <a:pPr lvl="2"/>
             <a:r>
-              <a:rPr lang="en-US"/>
+              <a:rPr lang="en-US" smtClean="0"/>
               <a:t>Third level</a:t>
             </a:r>
           </a:p>
           <a:p>
             <a:pPr lvl="3"/>
             <a:r>
-              <a:rPr lang="en-US"/>
+              <a:rPr lang="en-US" smtClean="0"/>
               <a:t>Fourth level</a:t>
             </a:r>
           </a:p>
           <a:p>
             <a:pPr lvl="4"/>
             <a:r>
-              <a:rPr lang="en-US"/>
+              <a:rPr lang="en-US" smtClean="0"/>
               <a:t>Fifth level</a:t>
             </a:r>
+            <a:endParaRPr lang="en-US"/>
           </a:p>
         </p:txBody>
       </p:sp>
@@ -3826,7 +3819,7 @@
           <a:p>
             <a:fld id="{5BCAD085-E8A6-8845-BD4E-CB4CCA059FC4}" type="datetimeFigureOut">
               <a:rPr lang="en-US" smtClean="0"/>
-              <a:t>7/22/26</a:t>
+              <a:t>1/27/13</a:t>
             </a:fld>
             <a:endParaRPr lang="en-US"/>
           </a:p>
@@ -3924,9 +3917,10 @@
           </a:lstStyle>
           <a:p>
             <a:r>
-              <a:rPr lang="en-US"/>
+              <a:rPr lang="en-US" smtClean="0"/>
               <a:t>Click to edit Master title style</a:t>
             </a:r>
+            <a:endParaRPr lang="en-US"/>
           </a:p>
         </p:txBody>
       </p:sp>
@@ -3989,7 +3983,7 @@
           <a:p>
             <a:pPr lvl="0"/>
             <a:r>
-              <a:rPr lang="en-US"/>
+              <a:rPr lang="en-US" smtClean="0"/>
               <a:t>Click to edit Master text styles</a:t>
             </a:r>
           </a:p>
@@ -4045,37 +4039,38 @@
           <a:p>
             <a:pPr lvl="0"/>
             <a:r>
-              <a:rPr lang="en-US"/>
+              <a:rPr lang="en-US" smtClean="0"/>
               <a:t>Click to edit Master text styles</a:t>
             </a:r>
           </a:p>
           <a:p>
             <a:pPr lvl="1"/>
             <a:r>
-              <a:rPr lang="en-US"/>
+              <a:rPr lang="en-US" smtClean="0"/>
               <a:t>Second level</a:t>
             </a:r>
           </a:p>
           <a:p>
             <a:pPr lvl="2"/>
             <a:r>
-              <a:rPr lang="en-US"/>
+              <a:rPr lang="en-US" smtClean="0"/>
               <a:t>Third level</a:t>
             </a:r>
           </a:p>
           <a:p>
             <a:pPr lvl="3"/>
             <a:r>
-              <a:rPr lang="en-US"/>
+              <a:rPr lang="en-US" smtClean="0"/>
               <a:t>Fourth level</a:t>
             </a:r>
           </a:p>
           <a:p>
             <a:pPr lvl="4"/>
             <a:r>
-              <a:rPr lang="en-US"/>
+              <a:rPr lang="en-US" smtClean="0"/>
               <a:t>Fifth level</a:t>
             </a:r>
+            <a:endParaRPr lang="en-US"/>
           </a:p>
         </p:txBody>
       </p:sp>
@@ -4138,7 +4133,7 @@
           <a:p>
             <a:pPr lvl="0"/>
             <a:r>
-              <a:rPr lang="en-US"/>
+              <a:rPr lang="en-US" smtClean="0"/>
               <a:t>Click to edit Master text styles</a:t>
             </a:r>
           </a:p>
@@ -4194,37 +4189,38 @@
           <a:p>
             <a:pPr lvl="0"/>
             <a:r>
-              <a:rPr lang="en-US"/>
+              <a:rPr lang="en-US" smtClean="0"/>
               <a:t>Click to edit Master text styles</a:t>
             </a:r>
           </a:p>
           <a:p>
             <a:pPr lvl="1"/>
             <a:r>
-              <a:rPr lang="en-US"/>
+              <a:rPr lang="en-US" smtClean="0"/>
               <a:t>Second level</a:t>
             </a:r>
           </a:p>
           <a:p>
             <a:pPr lvl="2"/>
             <a:r>
-              <a:rPr lang="en-US"/>
+              <a:rPr lang="en-US" smtClean="0"/>
               <a:t>Third level</a:t>
             </a:r>
           </a:p>
           <a:p>
             <a:pPr lvl="3"/>
             <a:r>
-              <a:rPr lang="en-US"/>
+              <a:rPr lang="en-US" smtClean="0"/>
               <a:t>Fourth level</a:t>
             </a:r>
           </a:p>
           <a:p>
             <a:pPr lvl="4"/>
             <a:r>
-              <a:rPr lang="en-US"/>
+              <a:rPr lang="en-US" smtClean="0"/>
               <a:t>Fifth level</a:t>
             </a:r>
+            <a:endParaRPr lang="en-US"/>
           </a:p>
         </p:txBody>
       </p:sp>
@@ -4245,7 +4241,7 @@
           <a:p>
             <a:fld id="{5BCAD085-E8A6-8845-BD4E-CB4CCA059FC4}" type="datetimeFigureOut">
               <a:rPr lang="en-US" smtClean="0"/>
-              <a:t>7/22/26</a:t>
+              <a:t>1/27/13</a:t>
             </a:fld>
             <a:endParaRPr lang="en-US"/>
           </a:p>
@@ -4339,9 +4335,10 @@
           <a:lstStyle/>
           <a:p>
             <a:r>
-              <a:rPr lang="en-US"/>
+              <a:rPr lang="en-US" smtClean="0"/>
               <a:t>Click to edit Master title style</a:t>
             </a:r>
+            <a:endParaRPr lang="en-US"/>
           </a:p>
         </p:txBody>
       </p:sp>
@@ -4362,7 +4359,7 @@
           <a:p>
             <a:fld id="{5BCAD085-E8A6-8845-BD4E-CB4CCA059FC4}" type="datetimeFigureOut">
               <a:rPr lang="en-US" smtClean="0"/>
-              <a:t>7/22/26</a:t>
+              <a:t>1/27/13</a:t>
             </a:fld>
             <a:endParaRPr lang="en-US"/>
           </a:p>
@@ -4457,7 +4454,7 @@
           <a:p>
             <a:fld id="{5BCAD085-E8A6-8845-BD4E-CB4CCA059FC4}" type="datetimeFigureOut">
               <a:rPr lang="en-US" smtClean="0"/>
-              <a:t>7/22/26</a:t>
+              <a:t>1/27/13</a:t>
             </a:fld>
             <a:endParaRPr lang="en-US"/>
           </a:p>
@@ -4560,9 +4557,10 @@
           </a:lstStyle>
           <a:p>
             <a:r>
-              <a:rPr lang="en-US"/>
+              <a:rPr lang="en-US" smtClean="0"/>
               <a:t>Click to edit Master title style</a:t>
             </a:r>
+            <a:endParaRPr lang="en-US"/>
           </a:p>
         </p:txBody>
       </p:sp>
@@ -4616,37 +4614,38 @@
           <a:p>
             <a:pPr lvl="0"/>
             <a:r>
-              <a:rPr lang="en-US"/>
+              <a:rPr lang="en-US" smtClean="0"/>
               <a:t>Click to edit Master text styles</a:t>
             </a:r>
           </a:p>
           <a:p>
             <a:pPr lvl="1"/>
             <a:r>
-              <a:rPr lang="en-US"/>
+              <a:rPr lang="en-US" smtClean="0"/>
               <a:t>Second level</a:t>
             </a:r>
           </a:p>
           <a:p>
             <a:pPr lvl="2"/>
             <a:r>
-              <a:rPr lang="en-US"/>
+              <a:rPr lang="en-US" smtClean="0"/>
               <a:t>Third level</a:t>
             </a:r>
           </a:p>
           <a:p>
             <a:pPr lvl="3"/>
             <a:r>
-              <a:rPr lang="en-US"/>
+              <a:rPr lang="en-US" smtClean="0"/>
               <a:t>Fourth level</a:t>
             </a:r>
           </a:p>
           <a:p>
             <a:pPr lvl="4"/>
             <a:r>
-              <a:rPr lang="en-US"/>
+              <a:rPr lang="en-US" smtClean="0"/>
               <a:t>Fifth level</a:t>
             </a:r>
+            <a:endParaRPr lang="en-US"/>
           </a:p>
         </p:txBody>
       </p:sp>
@@ -4709,7 +4708,7 @@
           <a:p>
             <a:pPr lvl="0"/>
             <a:r>
-              <a:rPr lang="en-US"/>
+              <a:rPr lang="en-US" smtClean="0"/>
               <a:t>Click to edit Master text styles</a:t>
             </a:r>
           </a:p>
@@ -4732,7 +4731,7 @@
           <a:p>
             <a:fld id="{5BCAD085-E8A6-8845-BD4E-CB4CCA059FC4}" type="datetimeFigureOut">
               <a:rPr lang="en-US" smtClean="0"/>
-              <a:t>7/22/26</a:t>
+              <a:t>1/27/13</a:t>
             </a:fld>
             <a:endParaRPr lang="en-US"/>
           </a:p>
@@ -4835,9 +4834,10 @@
           </a:lstStyle>
           <a:p>
             <a:r>
-              <a:rPr lang="en-US"/>
+              <a:rPr lang="en-US" smtClean="0"/>
               <a:t>Click to edit Master title style</a:t>
             </a:r>
+            <a:endParaRPr lang="en-US"/>
           </a:p>
         </p:txBody>
       </p:sp>
@@ -4961,7 +4961,7 @@
           <a:p>
             <a:pPr lvl="0"/>
             <a:r>
-              <a:rPr lang="en-US"/>
+              <a:rPr lang="en-US" smtClean="0"/>
               <a:t>Click to edit Master text styles</a:t>
             </a:r>
           </a:p>
@@ -4984,7 +4984,7 @@
           <a:p>
             <a:fld id="{5BCAD085-E8A6-8845-BD4E-CB4CCA059FC4}" type="datetimeFigureOut">
               <a:rPr lang="en-US" smtClean="0"/>
-              <a:t>7/22/26</a:t>
+              <a:t>1/27/13</a:t>
             </a:fld>
             <a:endParaRPr lang="en-US"/>
           </a:p>
@@ -5093,9 +5093,10 @@
           <a:lstStyle/>
           <a:p>
             <a:r>
-              <a:rPr lang="en-US"/>
+              <a:rPr lang="en-US" smtClean="0"/>
               <a:t>Click to edit Master title style</a:t>
             </a:r>
+            <a:endParaRPr lang="en-US"/>
           </a:p>
         </p:txBody>
       </p:sp>
@@ -5126,37 +5127,38 @@
           <a:p>
             <a:pPr lvl="0"/>
             <a:r>
-              <a:rPr lang="en-US"/>
+              <a:rPr lang="en-US" smtClean="0"/>
               <a:t>Click to edit Master text styles</a:t>
             </a:r>
           </a:p>
           <a:p>
             <a:pPr lvl="1"/>
             <a:r>
-              <a:rPr lang="en-US"/>
+              <a:rPr lang="en-US" smtClean="0"/>
               <a:t>Second level</a:t>
             </a:r>
           </a:p>
           <a:p>
             <a:pPr lvl="2"/>
             <a:r>
-              <a:rPr lang="en-US"/>
+              <a:rPr lang="en-US" smtClean="0"/>
               <a:t>Third level</a:t>
             </a:r>
           </a:p>
           <a:p>
             <a:pPr lvl="3"/>
             <a:r>
-              <a:rPr lang="en-US"/>
+              <a:rPr lang="en-US" smtClean="0"/>
               <a:t>Fourth level</a:t>
             </a:r>
           </a:p>
           <a:p>
             <a:pPr lvl="4"/>
             <a:r>
-              <a:rPr lang="en-US"/>
+              <a:rPr lang="en-US" smtClean="0"/>
               <a:t>Fifth level</a:t>
             </a:r>
+            <a:endParaRPr lang="en-US"/>
           </a:p>
         </p:txBody>
       </p:sp>
@@ -5195,7 +5197,7 @@
           <a:p>
             <a:fld id="{5BCAD085-E8A6-8845-BD4E-CB4CCA059FC4}" type="datetimeFigureOut">
               <a:rPr lang="en-US" smtClean="0"/>
-              <a:t>7/22/26</a:t>
+              <a:t>1/27/13</a:t>
             </a:fld>
             <a:endParaRPr lang="en-US"/>
           </a:p>
@@ -5554,7 +5556,7 @@
 </file>
 
 <file path=ppt/slides/slide1.xml><?xml version="1.0" encoding="utf-8"?>
-<p:sld xmlns:a="http://schemas.openxmlformats.org/drawingml/2006/main" xmlns:r="http://schemas.openxmlformats.org/officeDocument/2006/relationships" xmlns:p="http://schemas.openxmlformats.org/presentationml/2006/main">
+<p:sld xmlns:a="http://schemas.openxmlformats.org/drawingml/2006/main" xmlns:p="http://schemas.openxmlformats.org/presentationml/2006/main" xmlns:r="http://schemas.openxmlformats.org/officeDocument/2006/relationships">
   <p:cSld>
     <p:bg>
       <p:bgPr>
@@ -5570,14 +5572,7 @@
         <p:cNvGrpSpPr/>
         <p:nvPr/>
       </p:nvGrpSpPr>
-      <p:grpSpPr>
-        <a:xfrm>
-          <a:off x="0" y="0"/>
-          <a:ext cx="0" cy="0"/>
-          <a:chOff x="0" y="0"/>
-          <a:chExt cx="0" cy="0"/>
-        </a:xfrm>
-      </p:grpSpPr>
+      <p:grpSpPr/>
       <p:sp>
         <p:nvSpPr>
           <p:cNvPr id="2" name="Rectangle 1"/>
@@ -5619,7 +5614,6 @@
           <a:lstStyle/>
           <a:p>
             <a:pPr algn="ctr"/>
-            <a:endParaRPr/>
           </a:p>
         </p:txBody>
       </p:sp>
@@ -5640,7 +5634,7 @@
           <a:noFill/>
         </p:spPr>
         <p:txBody>
-          <a:bodyPr wrap="square" lIns="0" tIns="0" rIns="0" bIns="0" anchor="t">
+          <a:bodyPr wrap="square" anchor="t" lIns="0" rIns="0" tIns="0" bIns="0">
             <a:spAutoFit/>
           </a:bodyPr>
           <a:lstStyle/>
@@ -5706,7 +5700,7 @@
           <a:noFill/>
         </p:spPr>
         <p:txBody>
-          <a:bodyPr wrap="square" lIns="0" tIns="0" rIns="0" bIns="0" anchor="t">
+          <a:bodyPr wrap="square" anchor="t" lIns="0" rIns="0" tIns="0" bIns="0">
             <a:spAutoFit/>
           </a:bodyPr>
           <a:lstStyle/>
@@ -5741,7 +5735,7 @@
 </file>
 
 <file path=ppt/slides/slide10.xml><?xml version="1.0" encoding="utf-8"?>
-<p:sld xmlns:a="http://schemas.openxmlformats.org/drawingml/2006/main" xmlns:r="http://schemas.openxmlformats.org/officeDocument/2006/relationships" xmlns:p="http://schemas.openxmlformats.org/presentationml/2006/main">
+<p:sld xmlns:a="http://schemas.openxmlformats.org/drawingml/2006/main" xmlns:p="http://schemas.openxmlformats.org/presentationml/2006/main" xmlns:r="http://schemas.openxmlformats.org/officeDocument/2006/relationships">
   <p:cSld>
     <p:bg>
       <p:bgPr>
@@ -5757,14 +5751,7 @@
         <p:cNvGrpSpPr/>
         <p:nvPr/>
       </p:nvGrpSpPr>
-      <p:grpSpPr>
-        <a:xfrm>
-          <a:off x="0" y="0"/>
-          <a:ext cx="0" cy="0"/>
-          <a:chOff x="0" y="0"/>
-          <a:chExt cx="0" cy="0"/>
-        </a:xfrm>
-      </p:grpSpPr>
+      <p:grpSpPr/>
       <p:sp>
         <p:nvSpPr>
           <p:cNvPr id="2" name="Rectangle 1"/>
@@ -5806,7 +5793,6 @@
           <a:lstStyle/>
           <a:p>
             <a:pPr algn="ctr"/>
-            <a:endParaRPr/>
           </a:p>
         </p:txBody>
       </p:sp>
@@ -5827,7 +5813,7 @@
           <a:noFill/>
         </p:spPr>
         <p:txBody>
-          <a:bodyPr wrap="square" lIns="0" tIns="0" rIns="0" bIns="0" anchor="t">
+          <a:bodyPr wrap="square" anchor="t" lIns="0" rIns="0" tIns="0" bIns="0">
             <a:spAutoFit/>
           </a:bodyPr>
           <a:lstStyle/>
@@ -5861,7 +5847,7 @@
           <a:noFill/>
         </p:spPr>
         <p:txBody>
-          <a:bodyPr wrap="square" lIns="0" tIns="0" rIns="0" bIns="0" anchor="t">
+          <a:bodyPr wrap="square" anchor="t" lIns="0" rIns="0" tIns="0" bIns="0">
             <a:spAutoFit/>
           </a:bodyPr>
           <a:lstStyle/>
@@ -5951,7 +5937,6 @@
           <a:lstStyle/>
           <a:p>
             <a:pPr algn="ctr"/>
-            <a:endParaRPr/>
           </a:p>
         </p:txBody>
       </p:sp>
@@ -5972,7 +5957,7 @@
           <a:noFill/>
         </p:spPr>
         <p:txBody>
-          <a:bodyPr wrap="square" lIns="0" tIns="0" rIns="0" bIns="0" anchor="t">
+          <a:bodyPr wrap="square" anchor="t" lIns="0" rIns="0" tIns="0" bIns="0">
             <a:spAutoFit/>
           </a:bodyPr>
           <a:lstStyle/>
@@ -6015,13 +6000,21 @@
           <a:noFill/>
         </p:spPr>
         <p:txBody>
-          <a:bodyPr wrap="square" lIns="0" tIns="0" rIns="0" bIns="0" anchor="t">
+          <a:bodyPr wrap="square" anchor="t" lIns="0" rIns="0" tIns="0" bIns="0">
             <a:spAutoFit/>
           </a:bodyPr>
           <a:lstStyle/>
           <a:p>
             <a:pPr algn="r"/>
-            <a:endParaRPr/>
+            <a:r>
+              <a:rPr sz="1100" b="0" i="0">
+                <a:solidFill>
+                  <a:srgbClr val="7A7A7A"/>
+                </a:solidFill>
+                <a:latin typeface="Roboto"/>
+              </a:rPr>
+              <a:t/>
+            </a:r>
           </a:p>
         </p:txBody>
       </p:sp>
@@ -6034,7 +6027,7 @@
 </file>
 
 <file path=ppt/slides/slide11.xml><?xml version="1.0" encoding="utf-8"?>
-<p:sld xmlns:a="http://schemas.openxmlformats.org/drawingml/2006/main" xmlns:r="http://schemas.openxmlformats.org/officeDocument/2006/relationships" xmlns:p="http://schemas.openxmlformats.org/presentationml/2006/main">
+<p:sld xmlns:a="http://schemas.openxmlformats.org/drawingml/2006/main" xmlns:p="http://schemas.openxmlformats.org/presentationml/2006/main" xmlns:r="http://schemas.openxmlformats.org/officeDocument/2006/relationships">
   <p:cSld>
     <p:bg>
       <p:bgPr>
@@ -6050,14 +6043,7 @@
         <p:cNvGrpSpPr/>
         <p:nvPr/>
       </p:nvGrpSpPr>
-      <p:grpSpPr>
-        <a:xfrm>
-          <a:off x="0" y="0"/>
-          <a:ext cx="0" cy="0"/>
-          <a:chOff x="0" y="0"/>
-          <a:chExt cx="0" cy="0"/>
-        </a:xfrm>
-      </p:grpSpPr>
+      <p:grpSpPr/>
       <p:sp>
         <p:nvSpPr>
           <p:cNvPr id="2" name="TextBox 1"/>
@@ -6075,7 +6061,7 @@
           <a:noFill/>
         </p:spPr>
         <p:txBody>
-          <a:bodyPr wrap="square" lIns="0" tIns="0" rIns="0" bIns="0" anchor="t">
+          <a:bodyPr wrap="square" anchor="t" lIns="0" rIns="0" tIns="0" bIns="0">
             <a:spAutoFit/>
           </a:bodyPr>
           <a:lstStyle/>
@@ -6133,7 +6119,6 @@
           <a:lstStyle/>
           <a:p>
             <a:pPr algn="ctr"/>
-            <a:endParaRPr/>
           </a:p>
         </p:txBody>
       </p:sp>
@@ -6154,7 +6139,7 @@
           <a:noFill/>
         </p:spPr>
         <p:txBody>
-          <a:bodyPr wrap="square" lIns="0" tIns="0" rIns="0" bIns="0" anchor="ctr">
+          <a:bodyPr wrap="square" anchor="ctr" lIns="0" rIns="0" tIns="0" bIns="0">
             <a:spAutoFit/>
           </a:bodyPr>
           <a:lstStyle/>
@@ -6294,7 +6279,6 @@
           <a:lstStyle/>
           <a:p>
             <a:pPr algn="ctr"/>
-            <a:endParaRPr/>
           </a:p>
         </p:txBody>
       </p:sp>
@@ -6315,7 +6299,7 @@
           <a:noFill/>
         </p:spPr>
         <p:txBody>
-          <a:bodyPr wrap="square" lIns="0" tIns="0" rIns="0" bIns="0" anchor="t">
+          <a:bodyPr wrap="square" anchor="t" lIns="0" rIns="0" tIns="0" bIns="0">
             <a:spAutoFit/>
           </a:bodyPr>
           <a:lstStyle/>
@@ -6358,7 +6342,7 @@
           <a:noFill/>
         </p:spPr>
         <p:txBody>
-          <a:bodyPr wrap="square" lIns="0" tIns="0" rIns="0" bIns="0" anchor="t">
+          <a:bodyPr wrap="square" anchor="t" lIns="0" rIns="0" tIns="0" bIns="0">
             <a:spAutoFit/>
           </a:bodyPr>
           <a:lstStyle/>
@@ -6385,7 +6369,7 @@
 </file>
 
 <file path=ppt/slides/slide12.xml><?xml version="1.0" encoding="utf-8"?>
-<p:sld xmlns:a="http://schemas.openxmlformats.org/drawingml/2006/main" xmlns:r="http://schemas.openxmlformats.org/officeDocument/2006/relationships" xmlns:p="http://schemas.openxmlformats.org/presentationml/2006/main">
+<p:sld xmlns:a="http://schemas.openxmlformats.org/drawingml/2006/main" xmlns:p="http://schemas.openxmlformats.org/presentationml/2006/main" xmlns:r="http://schemas.openxmlformats.org/officeDocument/2006/relationships">
   <p:cSld>
     <p:bg>
       <p:bgPr>
@@ -6401,14 +6385,7 @@
         <p:cNvGrpSpPr/>
         <p:nvPr/>
       </p:nvGrpSpPr>
-      <p:grpSpPr>
-        <a:xfrm>
-          <a:off x="0" y="0"/>
-          <a:ext cx="0" cy="0"/>
-          <a:chOff x="0" y="0"/>
-          <a:chExt cx="0" cy="0"/>
-        </a:xfrm>
-      </p:grpSpPr>
+      <p:grpSpPr/>
       <p:sp>
         <p:nvSpPr>
           <p:cNvPr id="2" name="TextBox 1"/>
@@ -6426,7 +6403,7 @@
           <a:noFill/>
         </p:spPr>
         <p:txBody>
-          <a:bodyPr wrap="square" lIns="0" tIns="0" rIns="0" bIns="0" anchor="t">
+          <a:bodyPr wrap="square" anchor="t" lIns="0" rIns="0" tIns="0" bIns="0">
             <a:spAutoFit/>
           </a:bodyPr>
           <a:lstStyle/>
@@ -6484,7 +6461,6 @@
           <a:lstStyle/>
           <a:p>
             <a:pPr algn="ctr"/>
-            <a:endParaRPr/>
           </a:p>
         </p:txBody>
       </p:sp>
@@ -6505,7 +6481,7 @@
           <a:noFill/>
         </p:spPr>
         <p:txBody>
-          <a:bodyPr wrap="square" lIns="0" tIns="0" rIns="0" bIns="0" anchor="ctr">
+          <a:bodyPr wrap="square" anchor="ctr" lIns="0" rIns="0" tIns="0" bIns="0">
             <a:spAutoFit/>
           </a:bodyPr>
           <a:lstStyle/>
@@ -6676,7 +6652,6 @@
           <a:lstStyle/>
           <a:p>
             <a:pPr algn="ctr"/>
-            <a:endParaRPr/>
           </a:p>
         </p:txBody>
       </p:sp>
@@ -6697,7 +6672,7 @@
           <a:noFill/>
         </p:spPr>
         <p:txBody>
-          <a:bodyPr wrap="square" lIns="0" tIns="0" rIns="0" bIns="0" anchor="t">
+          <a:bodyPr wrap="square" anchor="t" lIns="0" rIns="0" tIns="0" bIns="0">
             <a:spAutoFit/>
           </a:bodyPr>
           <a:lstStyle/>
@@ -6740,7 +6715,7 @@
           <a:noFill/>
         </p:spPr>
         <p:txBody>
-          <a:bodyPr wrap="square" lIns="0" tIns="0" rIns="0" bIns="0" anchor="t">
+          <a:bodyPr wrap="square" anchor="t" lIns="0" rIns="0" tIns="0" bIns="0">
             <a:spAutoFit/>
           </a:bodyPr>
           <a:lstStyle/>
@@ -6767,7 +6742,7 @@
 </file>
 
 <file path=ppt/slides/slide13.xml><?xml version="1.0" encoding="utf-8"?>
-<p:sld xmlns:a="http://schemas.openxmlformats.org/drawingml/2006/main" xmlns:r="http://schemas.openxmlformats.org/officeDocument/2006/relationships" xmlns:p="http://schemas.openxmlformats.org/presentationml/2006/main">
+<p:sld xmlns:a="http://schemas.openxmlformats.org/drawingml/2006/main" xmlns:p="http://schemas.openxmlformats.org/presentationml/2006/main" xmlns:r="http://schemas.openxmlformats.org/officeDocument/2006/relationships">
   <p:cSld>
     <p:bg>
       <p:bgPr>
@@ -6783,14 +6758,7 @@
         <p:cNvGrpSpPr/>
         <p:nvPr/>
       </p:nvGrpSpPr>
-      <p:grpSpPr>
-        <a:xfrm>
-          <a:off x="0" y="0"/>
-          <a:ext cx="0" cy="0"/>
-          <a:chOff x="0" y="0"/>
-          <a:chExt cx="0" cy="0"/>
-        </a:xfrm>
-      </p:grpSpPr>
+      <p:grpSpPr/>
       <p:sp>
         <p:nvSpPr>
           <p:cNvPr id="2" name="TextBox 1"/>
@@ -6808,7 +6776,7 @@
           <a:noFill/>
         </p:spPr>
         <p:txBody>
-          <a:bodyPr wrap="square" lIns="0" tIns="0" rIns="0" bIns="0" anchor="t">
+          <a:bodyPr wrap="square" anchor="t" lIns="0" rIns="0" tIns="0" bIns="0">
             <a:spAutoFit/>
           </a:bodyPr>
           <a:lstStyle/>
@@ -6866,7 +6834,6 @@
           <a:lstStyle/>
           <a:p>
             <a:pPr algn="ctr"/>
-            <a:endParaRPr/>
           </a:p>
         </p:txBody>
       </p:sp>
@@ -6887,7 +6854,7 @@
           <a:noFill/>
         </p:spPr>
         <p:txBody>
-          <a:bodyPr wrap="square" lIns="0" tIns="0" rIns="0" bIns="0" anchor="ctr">
+          <a:bodyPr wrap="square" anchor="ctr" lIns="0" rIns="0" tIns="0" bIns="0">
             <a:spAutoFit/>
           </a:bodyPr>
           <a:lstStyle/>
@@ -7058,7 +7025,6 @@
           <a:lstStyle/>
           <a:p>
             <a:pPr algn="ctr"/>
-            <a:endParaRPr/>
           </a:p>
         </p:txBody>
       </p:sp>
@@ -7079,7 +7045,7 @@
           <a:noFill/>
         </p:spPr>
         <p:txBody>
-          <a:bodyPr wrap="square" lIns="0" tIns="0" rIns="0" bIns="0" anchor="t">
+          <a:bodyPr wrap="square" anchor="t" lIns="0" rIns="0" tIns="0" bIns="0">
             <a:spAutoFit/>
           </a:bodyPr>
           <a:lstStyle/>
@@ -7122,7 +7088,7 @@
           <a:noFill/>
         </p:spPr>
         <p:txBody>
-          <a:bodyPr wrap="square" lIns="0" tIns="0" rIns="0" bIns="0" anchor="t">
+          <a:bodyPr wrap="square" anchor="t" lIns="0" rIns="0" tIns="0" bIns="0">
             <a:spAutoFit/>
           </a:bodyPr>
           <a:lstStyle/>
@@ -7149,7 +7115,7 @@
 </file>
 
 <file path=ppt/slides/slide14.xml><?xml version="1.0" encoding="utf-8"?>
-<p:sld xmlns:a="http://schemas.openxmlformats.org/drawingml/2006/main" xmlns:r="http://schemas.openxmlformats.org/officeDocument/2006/relationships" xmlns:p="http://schemas.openxmlformats.org/presentationml/2006/main">
+<p:sld xmlns:a="http://schemas.openxmlformats.org/drawingml/2006/main" xmlns:p="http://schemas.openxmlformats.org/presentationml/2006/main" xmlns:r="http://schemas.openxmlformats.org/officeDocument/2006/relationships">
   <p:cSld>
     <p:bg>
       <p:bgPr>
@@ -7165,14 +7131,7 @@
         <p:cNvGrpSpPr/>
         <p:nvPr/>
       </p:nvGrpSpPr>
-      <p:grpSpPr>
-        <a:xfrm>
-          <a:off x="0" y="0"/>
-          <a:ext cx="0" cy="0"/>
-          <a:chOff x="0" y="0"/>
-          <a:chExt cx="0" cy="0"/>
-        </a:xfrm>
-      </p:grpSpPr>
+      <p:grpSpPr/>
       <p:sp>
         <p:nvSpPr>
           <p:cNvPr id="2" name="Rectangle 1"/>
@@ -7214,7 +7173,6 @@
           <a:lstStyle/>
           <a:p>
             <a:pPr algn="ctr"/>
-            <a:endParaRPr/>
           </a:p>
         </p:txBody>
       </p:sp>
@@ -7288,7 +7246,7 @@
           <a:noFill/>
         </p:spPr>
         <p:txBody>
-          <a:bodyPr wrap="square" lIns="0" tIns="0" rIns="0" bIns="0" anchor="ctr">
+          <a:bodyPr wrap="square" anchor="ctr" lIns="0" rIns="0" tIns="0" bIns="0">
             <a:spAutoFit/>
           </a:bodyPr>
           <a:lstStyle/>
@@ -7314,7 +7272,7 @@
         <p:spPr>
           <a:xfrm>
             <a:off x="658368" y="1554480"/>
-            <a:ext cx="10881360" cy="2603533"/>
+            <a:ext cx="10881360" cy="4297680"/>
           </a:xfrm>
           <a:prstGeom prst="rect">
             <a:avLst/>
@@ -7322,7 +7280,7 @@
           <a:noFill/>
         </p:spPr>
         <p:txBody>
-          <a:bodyPr wrap="square" lIns="0" tIns="0" rIns="0" bIns="0" anchor="t">
+          <a:bodyPr wrap="square" anchor="t" lIns="0" rIns="0" tIns="0" bIns="0">
             <a:spAutoFit/>
           </a:bodyPr>
           <a:lstStyle/>
@@ -7339,7 +7297,7 @@
               </a:spcAft>
             </a:pPr>
             <a:r>
-              <a:rPr sz="2000" b="1" i="0" dirty="0">
+              <a:rPr sz="1700" b="1" i="0">
                 <a:solidFill>
                   <a:srgbClr val="EDAB0C"/>
                 </a:solidFill>
@@ -7348,7 +7306,7 @@
               <a:t>■  </a:t>
             </a:r>
             <a:r>
-              <a:rPr sz="2000" b="0" i="0" dirty="0">
+              <a:rPr sz="1700" b="0" i="0">
                 <a:solidFill>
                   <a:srgbClr val="2A2929"/>
                 </a:solidFill>
@@ -7370,7 +7328,7 @@
               </a:spcAft>
             </a:pPr>
             <a:r>
-              <a:rPr sz="2000" b="1" i="0" dirty="0">
+              <a:rPr sz="1700" b="1" i="0">
                 <a:solidFill>
                   <a:srgbClr val="EDAB0C"/>
                 </a:solidFill>
@@ -7379,7 +7337,7 @@
               <a:t>■  </a:t>
             </a:r>
             <a:r>
-              <a:rPr sz="2000" b="0" i="0" dirty="0">
+              <a:rPr sz="1700" b="0" i="0">
                 <a:solidFill>
                   <a:srgbClr val="2A2929"/>
                 </a:solidFill>
@@ -7401,7 +7359,7 @@
               </a:spcAft>
             </a:pPr>
             <a:r>
-              <a:rPr b="0" i="0" dirty="0">
+              <a:rPr sz="1400" b="0" i="0">
                 <a:solidFill>
                   <a:srgbClr val="7A7A7A"/>
                 </a:solidFill>
@@ -7410,7 +7368,7 @@
               <a:t>–  </a:t>
             </a:r>
             <a:r>
-              <a:rPr b="0" i="0" dirty="0">
+              <a:rPr sz="1400" b="0" i="0">
                 <a:solidFill>
                   <a:srgbClr val="2A2929"/>
                 </a:solidFill>
@@ -7432,7 +7390,7 @@
               </a:spcAft>
             </a:pPr>
             <a:r>
-              <a:rPr b="0" i="0" dirty="0">
+              <a:rPr sz="1400" b="0" i="0">
                 <a:solidFill>
                   <a:srgbClr val="7A7A7A"/>
                 </a:solidFill>
@@ -7441,7 +7399,7 @@
               <a:t>–  </a:t>
             </a:r>
             <a:r>
-              <a:rPr b="0" i="0" dirty="0">
+              <a:rPr sz="1400" b="0" i="0">
                 <a:solidFill>
                   <a:srgbClr val="2A2929"/>
                 </a:solidFill>
@@ -7463,7 +7421,7 @@
               </a:spcAft>
             </a:pPr>
             <a:r>
-              <a:rPr b="0" i="0" dirty="0">
+              <a:rPr sz="1400" b="0" i="0">
                 <a:solidFill>
                   <a:srgbClr val="7A7A7A"/>
                 </a:solidFill>
@@ -7472,7 +7430,7 @@
               <a:t>–  </a:t>
             </a:r>
             <a:r>
-              <a:rPr b="0" i="0" dirty="0">
+              <a:rPr sz="1400" b="0" i="0">
                 <a:solidFill>
                   <a:srgbClr val="2A2929"/>
                 </a:solidFill>
@@ -7494,7 +7452,7 @@
               </a:spcAft>
             </a:pPr>
             <a:r>
-              <a:rPr sz="2000" b="1" i="0" dirty="0">
+              <a:rPr sz="1700" b="1" i="0">
                 <a:solidFill>
                   <a:srgbClr val="EDAB0C"/>
                 </a:solidFill>
@@ -7503,7 +7461,7 @@
               <a:t>■  </a:t>
             </a:r>
             <a:r>
-              <a:rPr sz="2000" b="0" i="0" dirty="0">
+              <a:rPr sz="1700" b="0" i="0">
                 <a:solidFill>
                   <a:srgbClr val="2A2929"/>
                 </a:solidFill>
@@ -7557,7 +7515,6 @@
           <a:lstStyle/>
           <a:p>
             <a:pPr algn="ctr"/>
-            <a:endParaRPr/>
           </a:p>
         </p:txBody>
       </p:sp>
@@ -7578,7 +7535,7 @@
           <a:noFill/>
         </p:spPr>
         <p:txBody>
-          <a:bodyPr wrap="square" lIns="0" tIns="0" rIns="0" bIns="0" anchor="ctr">
+          <a:bodyPr wrap="square" anchor="ctr" lIns="0" rIns="0" tIns="0" bIns="0">
             <a:spAutoFit/>
           </a:bodyPr>
           <a:lstStyle/>
@@ -7636,7 +7593,6 @@
           <a:lstStyle/>
           <a:p>
             <a:pPr algn="ctr"/>
-            <a:endParaRPr/>
           </a:p>
         </p:txBody>
       </p:sp>
@@ -7657,7 +7613,7 @@
           <a:noFill/>
         </p:spPr>
         <p:txBody>
-          <a:bodyPr wrap="square" lIns="0" tIns="0" rIns="0" bIns="0" anchor="t">
+          <a:bodyPr wrap="square" anchor="t" lIns="0" rIns="0" tIns="0" bIns="0">
             <a:spAutoFit/>
           </a:bodyPr>
           <a:lstStyle/>
@@ -7700,7 +7656,7 @@
           <a:noFill/>
         </p:spPr>
         <p:txBody>
-          <a:bodyPr wrap="square" lIns="0" tIns="0" rIns="0" bIns="0" anchor="t">
+          <a:bodyPr wrap="square" anchor="t" lIns="0" rIns="0" tIns="0" bIns="0">
             <a:spAutoFit/>
           </a:bodyPr>
           <a:lstStyle/>
@@ -7727,7 +7683,7 @@
 </file>
 
 <file path=ppt/slides/slide15.xml><?xml version="1.0" encoding="utf-8"?>
-<p:sld xmlns:a="http://schemas.openxmlformats.org/drawingml/2006/main" xmlns:r="http://schemas.openxmlformats.org/officeDocument/2006/relationships" xmlns:p="http://schemas.openxmlformats.org/presentationml/2006/main">
+<p:sld xmlns:a="http://schemas.openxmlformats.org/drawingml/2006/main" xmlns:p="http://schemas.openxmlformats.org/presentationml/2006/main" xmlns:r="http://schemas.openxmlformats.org/officeDocument/2006/relationships">
   <p:cSld>
     <p:bg>
       <p:bgPr>
@@ -7743,14 +7699,7 @@
         <p:cNvGrpSpPr/>
         <p:nvPr/>
       </p:nvGrpSpPr>
-      <p:grpSpPr>
-        <a:xfrm>
-          <a:off x="0" y="0"/>
-          <a:ext cx="0" cy="0"/>
-          <a:chOff x="0" y="0"/>
-          <a:chExt cx="0" cy="0"/>
-        </a:xfrm>
-      </p:grpSpPr>
+      <p:grpSpPr/>
       <p:sp>
         <p:nvSpPr>
           <p:cNvPr id="2" name="TextBox 1"/>
@@ -7768,7 +7717,7 @@
           <a:noFill/>
         </p:spPr>
         <p:txBody>
-          <a:bodyPr wrap="square" lIns="0" tIns="0" rIns="0" bIns="0" anchor="t">
+          <a:bodyPr wrap="square" anchor="t" lIns="0" rIns="0" tIns="0" bIns="0">
             <a:spAutoFit/>
           </a:bodyPr>
           <a:lstStyle/>
@@ -7842,7 +7791,6 @@
           <a:lstStyle/>
           <a:p>
             <a:pPr algn="ctr"/>
-            <a:endParaRPr/>
           </a:p>
         </p:txBody>
       </p:sp>
@@ -7889,7 +7837,6 @@
           <a:lstStyle/>
           <a:p>
             <a:pPr algn="ctr"/>
-            <a:endParaRPr/>
           </a:p>
         </p:txBody>
       </p:sp>
@@ -7934,7 +7881,6 @@
           <a:lstStyle/>
           <a:p>
             <a:pPr algn="ctr"/>
-            <a:endParaRPr/>
           </a:p>
         </p:txBody>
       </p:sp>
@@ -7955,7 +7901,7 @@
           <a:noFill/>
         </p:spPr>
         <p:txBody>
-          <a:bodyPr wrap="square" lIns="0" tIns="0" rIns="0" bIns="0" anchor="ctr">
+          <a:bodyPr wrap="square" anchor="ctr" lIns="0" rIns="0" tIns="0" bIns="0">
             <a:spAutoFit/>
           </a:bodyPr>
           <a:lstStyle/>
@@ -8020,7 +7966,6 @@
           <a:lstStyle/>
           <a:p>
             <a:pPr algn="ctr"/>
-            <a:endParaRPr/>
           </a:p>
         </p:txBody>
       </p:sp>
@@ -8065,7 +8010,6 @@
           <a:lstStyle/>
           <a:p>
             <a:pPr algn="ctr"/>
-            <a:endParaRPr/>
           </a:p>
         </p:txBody>
       </p:sp>
@@ -8086,7 +8030,7 @@
           <a:noFill/>
         </p:spPr>
         <p:txBody>
-          <a:bodyPr wrap="square" lIns="0" tIns="0" rIns="0" bIns="0" anchor="ctr">
+          <a:bodyPr wrap="square" anchor="ctr" lIns="0" rIns="0" tIns="0" bIns="0">
             <a:spAutoFit/>
           </a:bodyPr>
           <a:lstStyle/>
@@ -8151,7 +8095,6 @@
           <a:lstStyle/>
           <a:p>
             <a:pPr algn="ctr"/>
-            <a:endParaRPr/>
           </a:p>
         </p:txBody>
       </p:sp>
@@ -8196,7 +8139,6 @@
           <a:lstStyle/>
           <a:p>
             <a:pPr algn="ctr"/>
-            <a:endParaRPr/>
           </a:p>
         </p:txBody>
       </p:sp>
@@ -8217,7 +8159,7 @@
           <a:noFill/>
         </p:spPr>
         <p:txBody>
-          <a:bodyPr wrap="square" lIns="0" tIns="0" rIns="0" bIns="0" anchor="ctr">
+          <a:bodyPr wrap="square" anchor="ctr" lIns="0" rIns="0" tIns="0" bIns="0">
             <a:spAutoFit/>
           </a:bodyPr>
           <a:lstStyle/>
@@ -8280,7 +8222,6 @@
           <a:lstStyle/>
           <a:p>
             <a:pPr algn="ctr"/>
-            <a:endParaRPr/>
           </a:p>
         </p:txBody>
       </p:sp>
@@ -8301,7 +8242,7 @@
           <a:noFill/>
         </p:spPr>
         <p:txBody>
-          <a:bodyPr wrap="square" lIns="0" tIns="0" rIns="0" bIns="0" anchor="t">
+          <a:bodyPr wrap="square" anchor="t" lIns="0" rIns="0" tIns="0" bIns="0">
             <a:spAutoFit/>
           </a:bodyPr>
           <a:lstStyle/>
@@ -8344,7 +8285,7 @@
           <a:noFill/>
         </p:spPr>
         <p:txBody>
-          <a:bodyPr wrap="square" lIns="0" tIns="0" rIns="0" bIns="0" anchor="t">
+          <a:bodyPr wrap="square" anchor="t" lIns="0" rIns="0" tIns="0" bIns="0">
             <a:spAutoFit/>
           </a:bodyPr>
           <a:lstStyle/>
@@ -8371,7 +8312,7 @@
 </file>
 
 <file path=ppt/slides/slide16.xml><?xml version="1.0" encoding="utf-8"?>
-<p:sld xmlns:a="http://schemas.openxmlformats.org/drawingml/2006/main" xmlns:r="http://schemas.openxmlformats.org/officeDocument/2006/relationships" xmlns:p="http://schemas.openxmlformats.org/presentationml/2006/main">
+<p:sld xmlns:a="http://schemas.openxmlformats.org/drawingml/2006/main" xmlns:p="http://schemas.openxmlformats.org/presentationml/2006/main" xmlns:r="http://schemas.openxmlformats.org/officeDocument/2006/relationships">
   <p:cSld>
     <p:bg>
       <p:bgPr>
@@ -8387,14 +8328,7 @@
         <p:cNvGrpSpPr/>
         <p:nvPr/>
       </p:nvGrpSpPr>
-      <p:grpSpPr>
-        <a:xfrm>
-          <a:off x="0" y="0"/>
-          <a:ext cx="0" cy="0"/>
-          <a:chOff x="0" y="0"/>
-          <a:chExt cx="0" cy="0"/>
-        </a:xfrm>
-      </p:grpSpPr>
+      <p:grpSpPr/>
       <p:sp>
         <p:nvSpPr>
           <p:cNvPr id="2" name="Rectangle 1"/>
@@ -8436,7 +8370,6 @@
           <a:lstStyle/>
           <a:p>
             <a:pPr algn="ctr"/>
-            <a:endParaRPr/>
           </a:p>
         </p:txBody>
       </p:sp>
@@ -8457,7 +8390,7 @@
           <a:noFill/>
         </p:spPr>
         <p:txBody>
-          <a:bodyPr wrap="square" lIns="0" tIns="0" rIns="0" bIns="0" anchor="t">
+          <a:bodyPr wrap="square" anchor="t" lIns="0" rIns="0" tIns="0" bIns="0">
             <a:spAutoFit/>
           </a:bodyPr>
           <a:lstStyle/>
@@ -8491,7 +8424,7 @@
           <a:noFill/>
         </p:spPr>
         <p:txBody>
-          <a:bodyPr wrap="square" lIns="0" tIns="0" rIns="0" bIns="0" anchor="t">
+          <a:bodyPr wrap="square" anchor="t" lIns="0" rIns="0" tIns="0" bIns="0">
             <a:spAutoFit/>
           </a:bodyPr>
           <a:lstStyle/>
@@ -8581,7 +8514,6 @@
           <a:lstStyle/>
           <a:p>
             <a:pPr algn="ctr"/>
-            <a:endParaRPr/>
           </a:p>
         </p:txBody>
       </p:sp>
@@ -8602,7 +8534,7 @@
           <a:noFill/>
         </p:spPr>
         <p:txBody>
-          <a:bodyPr wrap="square" lIns="0" tIns="0" rIns="0" bIns="0" anchor="t">
+          <a:bodyPr wrap="square" anchor="t" lIns="0" rIns="0" tIns="0" bIns="0">
             <a:spAutoFit/>
           </a:bodyPr>
           <a:lstStyle/>
@@ -8645,13 +8577,21 @@
           <a:noFill/>
         </p:spPr>
         <p:txBody>
-          <a:bodyPr wrap="square" lIns="0" tIns="0" rIns="0" bIns="0" anchor="t">
+          <a:bodyPr wrap="square" anchor="t" lIns="0" rIns="0" tIns="0" bIns="0">
             <a:spAutoFit/>
           </a:bodyPr>
           <a:lstStyle/>
           <a:p>
             <a:pPr algn="r"/>
-            <a:endParaRPr/>
+            <a:r>
+              <a:rPr sz="1100" b="0" i="0">
+                <a:solidFill>
+                  <a:srgbClr val="7A7A7A"/>
+                </a:solidFill>
+                <a:latin typeface="Roboto"/>
+              </a:rPr>
+              <a:t/>
+            </a:r>
           </a:p>
         </p:txBody>
       </p:sp>
@@ -8664,7 +8604,7 @@
 </file>
 
 <file path=ppt/slides/slide17.xml><?xml version="1.0" encoding="utf-8"?>
-<p:sld xmlns:a="http://schemas.openxmlformats.org/drawingml/2006/main" xmlns:r="http://schemas.openxmlformats.org/officeDocument/2006/relationships" xmlns:p="http://schemas.openxmlformats.org/presentationml/2006/main">
+<p:sld xmlns:a="http://schemas.openxmlformats.org/drawingml/2006/main" xmlns:p="http://schemas.openxmlformats.org/presentationml/2006/main" xmlns:r="http://schemas.openxmlformats.org/officeDocument/2006/relationships">
   <p:cSld>
     <p:bg>
       <p:bgPr>
@@ -8680,14 +8620,7 @@
         <p:cNvGrpSpPr/>
         <p:nvPr/>
       </p:nvGrpSpPr>
-      <p:grpSpPr>
-        <a:xfrm>
-          <a:off x="0" y="0"/>
-          <a:ext cx="0" cy="0"/>
-          <a:chOff x="0" y="0"/>
-          <a:chExt cx="0" cy="0"/>
-        </a:xfrm>
-      </p:grpSpPr>
+      <p:grpSpPr/>
       <p:sp>
         <p:nvSpPr>
           <p:cNvPr id="2" name="TextBox 1"/>
@@ -8705,7 +8638,7 @@
           <a:noFill/>
         </p:spPr>
         <p:txBody>
-          <a:bodyPr wrap="square" lIns="0" tIns="0" rIns="0" bIns="0" anchor="t">
+          <a:bodyPr wrap="square" anchor="t" lIns="0" rIns="0" tIns="0" bIns="0">
             <a:spAutoFit/>
           </a:bodyPr>
           <a:lstStyle/>
@@ -8763,7 +8696,6 @@
           <a:lstStyle/>
           <a:p>
             <a:pPr algn="ctr"/>
-            <a:endParaRPr/>
           </a:p>
         </p:txBody>
       </p:sp>
@@ -8784,7 +8716,7 @@
           <a:noFill/>
         </p:spPr>
         <p:txBody>
-          <a:bodyPr wrap="square" lIns="0" tIns="0" rIns="0" bIns="0" anchor="ctr">
+          <a:bodyPr wrap="square" anchor="ctr" lIns="0" rIns="0" tIns="0" bIns="0">
             <a:spAutoFit/>
           </a:bodyPr>
           <a:lstStyle/>
@@ -8893,7 +8825,6 @@
           <a:lstStyle/>
           <a:p>
             <a:pPr algn="ctr"/>
-            <a:endParaRPr/>
           </a:p>
         </p:txBody>
       </p:sp>
@@ -8914,7 +8845,7 @@
           <a:noFill/>
         </p:spPr>
         <p:txBody>
-          <a:bodyPr wrap="square" lIns="0" tIns="0" rIns="0" bIns="0" anchor="t">
+          <a:bodyPr wrap="square" anchor="t" lIns="0" rIns="0" tIns="0" bIns="0">
             <a:spAutoFit/>
           </a:bodyPr>
           <a:lstStyle/>
@@ -8957,7 +8888,7 @@
           <a:noFill/>
         </p:spPr>
         <p:txBody>
-          <a:bodyPr wrap="square" lIns="0" tIns="0" rIns="0" bIns="0" anchor="t">
+          <a:bodyPr wrap="square" anchor="t" lIns="0" rIns="0" tIns="0" bIns="0">
             <a:spAutoFit/>
           </a:bodyPr>
           <a:lstStyle/>
@@ -8984,7 +8915,7 @@
 </file>
 
 <file path=ppt/slides/slide18.xml><?xml version="1.0" encoding="utf-8"?>
-<p:sld xmlns:a="http://schemas.openxmlformats.org/drawingml/2006/main" xmlns:r="http://schemas.openxmlformats.org/officeDocument/2006/relationships" xmlns:p="http://schemas.openxmlformats.org/presentationml/2006/main">
+<p:sld xmlns:a="http://schemas.openxmlformats.org/drawingml/2006/main" xmlns:p="http://schemas.openxmlformats.org/presentationml/2006/main" xmlns:r="http://schemas.openxmlformats.org/officeDocument/2006/relationships">
   <p:cSld>
     <p:bg>
       <p:bgPr>
@@ -9000,14 +8931,7 @@
         <p:cNvGrpSpPr/>
         <p:nvPr/>
       </p:nvGrpSpPr>
-      <p:grpSpPr>
-        <a:xfrm>
-          <a:off x="0" y="0"/>
-          <a:ext cx="0" cy="0"/>
-          <a:chOff x="0" y="0"/>
-          <a:chExt cx="0" cy="0"/>
-        </a:xfrm>
-      </p:grpSpPr>
+      <p:grpSpPr/>
       <p:sp>
         <p:nvSpPr>
           <p:cNvPr id="2" name="TextBox 1"/>
@@ -9025,7 +8949,7 @@
           <a:noFill/>
         </p:spPr>
         <p:txBody>
-          <a:bodyPr wrap="square" lIns="0" tIns="0" rIns="0" bIns="0" anchor="t">
+          <a:bodyPr wrap="square" anchor="t" lIns="0" rIns="0" tIns="0" bIns="0">
             <a:spAutoFit/>
           </a:bodyPr>
           <a:lstStyle/>
@@ -9083,7 +9007,6 @@
           <a:lstStyle/>
           <a:p>
             <a:pPr algn="ctr"/>
-            <a:endParaRPr/>
           </a:p>
         </p:txBody>
       </p:sp>
@@ -9104,7 +9027,7 @@
           <a:noFill/>
         </p:spPr>
         <p:txBody>
-          <a:bodyPr wrap="square" lIns="0" tIns="0" rIns="0" bIns="0" anchor="ctr">
+          <a:bodyPr wrap="square" anchor="ctr" lIns="0" rIns="0" tIns="0" bIns="0">
             <a:spAutoFit/>
           </a:bodyPr>
           <a:lstStyle/>
@@ -9275,7 +9198,6 @@
           <a:lstStyle/>
           <a:p>
             <a:pPr algn="ctr"/>
-            <a:endParaRPr/>
           </a:p>
         </p:txBody>
       </p:sp>
@@ -9296,7 +9218,7 @@
           <a:noFill/>
         </p:spPr>
         <p:txBody>
-          <a:bodyPr wrap="square" lIns="0" tIns="0" rIns="0" bIns="0" anchor="t">
+          <a:bodyPr wrap="square" anchor="t" lIns="0" rIns="0" tIns="0" bIns="0">
             <a:spAutoFit/>
           </a:bodyPr>
           <a:lstStyle/>
@@ -9339,7 +9261,7 @@
           <a:noFill/>
         </p:spPr>
         <p:txBody>
-          <a:bodyPr wrap="square" lIns="0" tIns="0" rIns="0" bIns="0" anchor="t">
+          <a:bodyPr wrap="square" anchor="t" lIns="0" rIns="0" tIns="0" bIns="0">
             <a:spAutoFit/>
           </a:bodyPr>
           <a:lstStyle/>
@@ -9366,7 +9288,7 @@
 </file>
 
 <file path=ppt/slides/slide19.xml><?xml version="1.0" encoding="utf-8"?>
-<p:sld xmlns:a="http://schemas.openxmlformats.org/drawingml/2006/main" xmlns:r="http://schemas.openxmlformats.org/officeDocument/2006/relationships" xmlns:p="http://schemas.openxmlformats.org/presentationml/2006/main">
+<p:sld xmlns:a="http://schemas.openxmlformats.org/drawingml/2006/main" xmlns:p="http://schemas.openxmlformats.org/presentationml/2006/main" xmlns:r="http://schemas.openxmlformats.org/officeDocument/2006/relationships">
   <p:cSld>
     <p:bg>
       <p:bgPr>
@@ -9382,14 +9304,7 @@
         <p:cNvGrpSpPr/>
         <p:nvPr/>
       </p:nvGrpSpPr>
-      <p:grpSpPr>
-        <a:xfrm>
-          <a:off x="0" y="0"/>
-          <a:ext cx="0" cy="0"/>
-          <a:chOff x="0" y="0"/>
-          <a:chExt cx="0" cy="0"/>
-        </a:xfrm>
-      </p:grpSpPr>
+      <p:grpSpPr/>
       <p:sp>
         <p:nvSpPr>
           <p:cNvPr id="2" name="TextBox 1"/>
@@ -9407,7 +9322,7 @@
           <a:noFill/>
         </p:spPr>
         <p:txBody>
-          <a:bodyPr wrap="square" lIns="0" tIns="0" rIns="0" bIns="0" anchor="t">
+          <a:bodyPr wrap="square" anchor="t" lIns="0" rIns="0" tIns="0" bIns="0">
             <a:spAutoFit/>
           </a:bodyPr>
           <a:lstStyle/>
@@ -9481,7 +9396,6 @@
           <a:lstStyle/>
           <a:p>
             <a:pPr algn="ctr"/>
-            <a:endParaRPr/>
           </a:p>
         </p:txBody>
       </p:sp>
@@ -9502,7 +9416,7 @@
           <a:noFill/>
         </p:spPr>
         <p:txBody>
-          <a:bodyPr wrap="square" lIns="0" tIns="0" rIns="0" bIns="0" anchor="ctr">
+          <a:bodyPr wrap="square" anchor="ctr" lIns="0" rIns="0" tIns="0" bIns="0">
             <a:spAutoFit/>
           </a:bodyPr>
           <a:lstStyle/>
@@ -9735,7 +9649,6 @@
           <a:lstStyle/>
           <a:p>
             <a:pPr algn="ctr"/>
-            <a:endParaRPr/>
           </a:p>
         </p:txBody>
       </p:sp>
@@ -9756,7 +9669,7 @@
           <a:noFill/>
         </p:spPr>
         <p:txBody>
-          <a:bodyPr wrap="square" lIns="0" tIns="0" rIns="0" bIns="0" anchor="t">
+          <a:bodyPr wrap="square" anchor="t" lIns="0" rIns="0" tIns="0" bIns="0">
             <a:spAutoFit/>
           </a:bodyPr>
           <a:lstStyle/>
@@ -9799,7 +9712,7 @@
           <a:noFill/>
         </p:spPr>
         <p:txBody>
-          <a:bodyPr wrap="square" lIns="0" tIns="0" rIns="0" bIns="0" anchor="t">
+          <a:bodyPr wrap="square" anchor="t" lIns="0" rIns="0" tIns="0" bIns="0">
             <a:spAutoFit/>
           </a:bodyPr>
           <a:lstStyle/>
@@ -9826,7 +9739,7 @@
 </file>
 
 <file path=ppt/slides/slide2.xml><?xml version="1.0" encoding="utf-8"?>
-<p:sld xmlns:a="http://schemas.openxmlformats.org/drawingml/2006/main" xmlns:r="http://schemas.openxmlformats.org/officeDocument/2006/relationships" xmlns:p="http://schemas.openxmlformats.org/presentationml/2006/main">
+<p:sld xmlns:a="http://schemas.openxmlformats.org/drawingml/2006/main" xmlns:p="http://schemas.openxmlformats.org/presentationml/2006/main" xmlns:r="http://schemas.openxmlformats.org/officeDocument/2006/relationships">
   <p:cSld>
     <p:bg>
       <p:bgPr>
@@ -9842,14 +9755,7 @@
         <p:cNvGrpSpPr/>
         <p:nvPr/>
       </p:nvGrpSpPr>
-      <p:grpSpPr>
-        <a:xfrm>
-          <a:off x="0" y="0"/>
-          <a:ext cx="0" cy="0"/>
-          <a:chOff x="0" y="0"/>
-          <a:chExt cx="0" cy="0"/>
-        </a:xfrm>
-      </p:grpSpPr>
+      <p:grpSpPr/>
       <p:sp>
         <p:nvSpPr>
           <p:cNvPr id="2" name="TextBox 1"/>
@@ -9867,7 +9773,7 @@
           <a:noFill/>
         </p:spPr>
         <p:txBody>
-          <a:bodyPr wrap="square" lIns="0" tIns="0" rIns="0" bIns="0" anchor="t">
+          <a:bodyPr wrap="square" anchor="t" lIns="0" rIns="0" tIns="0" bIns="0">
             <a:spAutoFit/>
           </a:bodyPr>
           <a:lstStyle/>
@@ -9941,7 +9847,6 @@
           <a:lstStyle/>
           <a:p>
             <a:pPr algn="ctr"/>
-            <a:endParaRPr/>
           </a:p>
         </p:txBody>
       </p:sp>
@@ -9962,7 +9867,7 @@
           <a:noFill/>
         </p:spPr>
         <p:txBody>
-          <a:bodyPr wrap="square" lIns="0" tIns="0" rIns="0" bIns="0" anchor="ctr">
+          <a:bodyPr wrap="square" anchor="ctr" lIns="0" rIns="0" tIns="0" bIns="0">
             <a:spAutoFit/>
           </a:bodyPr>
           <a:lstStyle/>
@@ -10102,7 +10007,6 @@
           <a:lstStyle/>
           <a:p>
             <a:pPr algn="ctr"/>
-            <a:endParaRPr/>
           </a:p>
         </p:txBody>
       </p:sp>
@@ -10123,7 +10027,7 @@
           <a:noFill/>
         </p:spPr>
         <p:txBody>
-          <a:bodyPr wrap="square" lIns="0" tIns="0" rIns="0" bIns="0" anchor="t">
+          <a:bodyPr wrap="square" anchor="t" lIns="0" rIns="0" tIns="0" bIns="0">
             <a:spAutoFit/>
           </a:bodyPr>
           <a:lstStyle/>
@@ -10166,7 +10070,7 @@
           <a:noFill/>
         </p:spPr>
         <p:txBody>
-          <a:bodyPr wrap="square" lIns="0" tIns="0" rIns="0" bIns="0" anchor="t">
+          <a:bodyPr wrap="square" anchor="t" lIns="0" rIns="0" tIns="0" bIns="0">
             <a:spAutoFit/>
           </a:bodyPr>
           <a:lstStyle/>
@@ -10193,7 +10097,7 @@
 </file>
 
 <file path=ppt/slides/slide20.xml><?xml version="1.0" encoding="utf-8"?>
-<p:sld xmlns:a="http://schemas.openxmlformats.org/drawingml/2006/main" xmlns:r="http://schemas.openxmlformats.org/officeDocument/2006/relationships" xmlns:p="http://schemas.openxmlformats.org/presentationml/2006/main">
+<p:sld xmlns:a="http://schemas.openxmlformats.org/drawingml/2006/main" xmlns:p="http://schemas.openxmlformats.org/presentationml/2006/main" xmlns:r="http://schemas.openxmlformats.org/officeDocument/2006/relationships">
   <p:cSld>
     <p:bg>
       <p:bgPr>
@@ -10209,14 +10113,7 @@
         <p:cNvGrpSpPr/>
         <p:nvPr/>
       </p:nvGrpSpPr>
-      <p:grpSpPr>
-        <a:xfrm>
-          <a:off x="0" y="0"/>
-          <a:ext cx="0" cy="0"/>
-          <a:chOff x="0" y="0"/>
-          <a:chExt cx="0" cy="0"/>
-        </a:xfrm>
-      </p:grpSpPr>
+      <p:grpSpPr/>
       <p:sp>
         <p:nvSpPr>
           <p:cNvPr id="2" name="TextBox 1"/>
@@ -10234,7 +10131,7 @@
           <a:noFill/>
         </p:spPr>
         <p:txBody>
-          <a:bodyPr wrap="square" lIns="0" tIns="0" rIns="0" bIns="0" anchor="t">
+          <a:bodyPr wrap="square" anchor="t" lIns="0" rIns="0" tIns="0" bIns="0">
             <a:spAutoFit/>
           </a:bodyPr>
           <a:lstStyle/>
@@ -10292,7 +10189,6 @@
           <a:lstStyle/>
           <a:p>
             <a:pPr algn="ctr"/>
-            <a:endParaRPr/>
           </a:p>
         </p:txBody>
       </p:sp>
@@ -10313,7 +10209,7 @@
           <a:noFill/>
         </p:spPr>
         <p:txBody>
-          <a:bodyPr wrap="square" lIns="0" tIns="0" rIns="0" bIns="0" anchor="ctr">
+          <a:bodyPr wrap="square" anchor="ctr" lIns="0" rIns="0" tIns="0" bIns="0">
             <a:spAutoFit/>
           </a:bodyPr>
           <a:lstStyle/>
@@ -10376,7 +10272,7 @@
                 </a:solidFill>
                 <a:latin typeface="Roboto"/>
               </a:rPr>
-              <a:t>Capture the feedback in the Feedback Record.</a:t>
+              <a:t>Capture the feedback in the Feedback section (§11) of your Business Case.</a:t>
             </a:r>
           </a:p>
           <a:p>
@@ -10484,7 +10380,6 @@
           <a:lstStyle/>
           <a:p>
             <a:pPr algn="ctr"/>
-            <a:endParaRPr/>
           </a:p>
         </p:txBody>
       </p:sp>
@@ -10505,7 +10400,7 @@
           <a:noFill/>
         </p:spPr>
         <p:txBody>
-          <a:bodyPr wrap="square" lIns="0" tIns="0" rIns="0" bIns="0" anchor="t">
+          <a:bodyPr wrap="square" anchor="t" lIns="0" rIns="0" tIns="0" bIns="0">
             <a:spAutoFit/>
           </a:bodyPr>
           <a:lstStyle/>
@@ -10548,7 +10443,7 @@
           <a:noFill/>
         </p:spPr>
         <p:txBody>
-          <a:bodyPr wrap="square" lIns="0" tIns="0" rIns="0" bIns="0" anchor="t">
+          <a:bodyPr wrap="square" anchor="t" lIns="0" rIns="0" tIns="0" bIns="0">
             <a:spAutoFit/>
           </a:bodyPr>
           <a:lstStyle/>
@@ -10575,7 +10470,7 @@
 </file>
 
 <file path=ppt/slides/slide21.xml><?xml version="1.0" encoding="utf-8"?>
-<p:sld xmlns:a="http://schemas.openxmlformats.org/drawingml/2006/main" xmlns:r="http://schemas.openxmlformats.org/officeDocument/2006/relationships" xmlns:p="http://schemas.openxmlformats.org/presentationml/2006/main">
+<p:sld xmlns:a="http://schemas.openxmlformats.org/drawingml/2006/main" xmlns:p="http://schemas.openxmlformats.org/presentationml/2006/main" xmlns:r="http://schemas.openxmlformats.org/officeDocument/2006/relationships">
   <p:cSld>
     <p:bg>
       <p:bgPr>
@@ -10591,14 +10486,7 @@
         <p:cNvGrpSpPr/>
         <p:nvPr/>
       </p:nvGrpSpPr>
-      <p:grpSpPr>
-        <a:xfrm>
-          <a:off x="0" y="0"/>
-          <a:ext cx="0" cy="0"/>
-          <a:chOff x="0" y="0"/>
-          <a:chExt cx="0" cy="0"/>
-        </a:xfrm>
-      </p:grpSpPr>
+      <p:grpSpPr/>
       <p:sp>
         <p:nvSpPr>
           <p:cNvPr id="2" name="Rectangle 1"/>
@@ -10640,7 +10528,6 @@
           <a:lstStyle/>
           <a:p>
             <a:pPr algn="ctr"/>
-            <a:endParaRPr/>
           </a:p>
         </p:txBody>
       </p:sp>
@@ -10714,7 +10601,7 @@
           <a:noFill/>
         </p:spPr>
         <p:txBody>
-          <a:bodyPr wrap="square" lIns="0" tIns="0" rIns="0" bIns="0" anchor="ctr">
+          <a:bodyPr wrap="square" anchor="ctr" lIns="0" rIns="0" tIns="0" bIns="0">
             <a:spAutoFit/>
           </a:bodyPr>
           <a:lstStyle/>
@@ -10740,7 +10627,7 @@
         <p:spPr>
           <a:xfrm>
             <a:off x="658368" y="1554480"/>
-            <a:ext cx="10881360" cy="2439257"/>
+            <a:ext cx="10881360" cy="4297680"/>
           </a:xfrm>
           <a:prstGeom prst="rect">
             <a:avLst/>
@@ -10748,7 +10635,7 @@
           <a:noFill/>
         </p:spPr>
         <p:txBody>
-          <a:bodyPr wrap="square" lIns="0" tIns="0" rIns="0" bIns="0" anchor="t">
+          <a:bodyPr wrap="square" anchor="t" lIns="0" rIns="0" tIns="0" bIns="0">
             <a:spAutoFit/>
           </a:bodyPr>
           <a:lstStyle/>
@@ -10765,7 +10652,7 @@
               </a:spcAft>
             </a:pPr>
             <a:r>
-              <a:rPr sz="2400" b="1" i="0" dirty="0">
+              <a:rPr sz="1700" b="1" i="0">
                 <a:solidFill>
                   <a:srgbClr val="EDAB0C"/>
                 </a:solidFill>
@@ -10774,7 +10661,7 @@
               <a:t>■  </a:t>
             </a:r>
             <a:r>
-              <a:rPr sz="2400" b="0" i="0" dirty="0">
+              <a:rPr sz="1700" b="0" i="0">
                 <a:solidFill>
                   <a:srgbClr val="2A2929"/>
                 </a:solidFill>
@@ -10796,7 +10683,7 @@
               </a:spcAft>
             </a:pPr>
             <a:r>
-              <a:rPr sz="2000" b="0" i="0" dirty="0">
+              <a:rPr sz="1400" b="0" i="0">
                 <a:solidFill>
                   <a:srgbClr val="7A7A7A"/>
                 </a:solidFill>
@@ -10805,7 +10692,7 @@
               <a:t>–  </a:t>
             </a:r>
             <a:r>
-              <a:rPr sz="2000" b="0" i="0" dirty="0">
+              <a:rPr sz="1400" b="0" i="0">
                 <a:solidFill>
                   <a:srgbClr val="2A2929"/>
                 </a:solidFill>
@@ -10827,7 +10714,7 @@
               </a:spcAft>
             </a:pPr>
             <a:r>
-              <a:rPr sz="2000" b="0" i="0" dirty="0">
+              <a:rPr sz="1400" b="0" i="0">
                 <a:solidFill>
                   <a:srgbClr val="7A7A7A"/>
                 </a:solidFill>
@@ -10836,7 +10723,7 @@
               <a:t>–  </a:t>
             </a:r>
             <a:r>
-              <a:rPr sz="2000" b="0" i="0" dirty="0">
+              <a:rPr sz="1400" b="0" i="0">
                 <a:solidFill>
                   <a:srgbClr val="2A2929"/>
                 </a:solidFill>
@@ -10858,7 +10745,7 @@
               </a:spcAft>
             </a:pPr>
             <a:r>
-              <a:rPr sz="2400" b="1" i="0" dirty="0">
+              <a:rPr sz="1700" b="1" i="0">
                 <a:solidFill>
                   <a:srgbClr val="EDAB0C"/>
                 </a:solidFill>
@@ -10867,7 +10754,7 @@
               <a:t>■  </a:t>
             </a:r>
             <a:r>
-              <a:rPr sz="2400" b="0" i="0" dirty="0">
+              <a:rPr sz="1700" b="0" i="0">
                 <a:solidFill>
                   <a:srgbClr val="2A2929"/>
                 </a:solidFill>
@@ -10921,7 +10808,6 @@
           <a:lstStyle/>
           <a:p>
             <a:pPr algn="ctr"/>
-            <a:endParaRPr/>
           </a:p>
         </p:txBody>
       </p:sp>
@@ -10942,7 +10828,7 @@
           <a:noFill/>
         </p:spPr>
         <p:txBody>
-          <a:bodyPr wrap="square" lIns="0" tIns="0" rIns="0" bIns="0" anchor="ctr">
+          <a:bodyPr wrap="square" anchor="ctr" lIns="0" rIns="0" tIns="0" bIns="0">
             <a:spAutoFit/>
           </a:bodyPr>
           <a:lstStyle/>
@@ -11000,7 +10886,6 @@
           <a:lstStyle/>
           <a:p>
             <a:pPr algn="ctr"/>
-            <a:endParaRPr/>
           </a:p>
         </p:txBody>
       </p:sp>
@@ -11021,7 +10906,7 @@
           <a:noFill/>
         </p:spPr>
         <p:txBody>
-          <a:bodyPr wrap="square" lIns="0" tIns="0" rIns="0" bIns="0" anchor="t">
+          <a:bodyPr wrap="square" anchor="t" lIns="0" rIns="0" tIns="0" bIns="0">
             <a:spAutoFit/>
           </a:bodyPr>
           <a:lstStyle/>
@@ -11064,7 +10949,7 @@
           <a:noFill/>
         </p:spPr>
         <p:txBody>
-          <a:bodyPr wrap="square" lIns="0" tIns="0" rIns="0" bIns="0" anchor="t">
+          <a:bodyPr wrap="square" anchor="t" lIns="0" rIns="0" tIns="0" bIns="0">
             <a:spAutoFit/>
           </a:bodyPr>
           <a:lstStyle/>
@@ -11091,7 +10976,7 @@
 </file>
 
 <file path=ppt/slides/slide22.xml><?xml version="1.0" encoding="utf-8"?>
-<p:sld xmlns:a="http://schemas.openxmlformats.org/drawingml/2006/main" xmlns:r="http://schemas.openxmlformats.org/officeDocument/2006/relationships" xmlns:p="http://schemas.openxmlformats.org/presentationml/2006/main">
+<p:sld xmlns:a="http://schemas.openxmlformats.org/drawingml/2006/main" xmlns:p="http://schemas.openxmlformats.org/presentationml/2006/main" xmlns:r="http://schemas.openxmlformats.org/officeDocument/2006/relationships">
   <p:cSld>
     <p:bg>
       <p:bgPr>
@@ -11107,14 +10992,7 @@
         <p:cNvGrpSpPr/>
         <p:nvPr/>
       </p:nvGrpSpPr>
-      <p:grpSpPr>
-        <a:xfrm>
-          <a:off x="0" y="0"/>
-          <a:ext cx="0" cy="0"/>
-          <a:chOff x="0" y="0"/>
-          <a:chExt cx="0" cy="0"/>
-        </a:xfrm>
-      </p:grpSpPr>
+      <p:grpSpPr/>
       <p:sp>
         <p:nvSpPr>
           <p:cNvPr id="2" name="TextBox 1"/>
@@ -11132,7 +11010,7 @@
           <a:noFill/>
         </p:spPr>
         <p:txBody>
-          <a:bodyPr wrap="square" lIns="0" tIns="0" rIns="0" bIns="0" anchor="t">
+          <a:bodyPr wrap="square" anchor="t" lIns="0" rIns="0" tIns="0" bIns="0">
             <a:spAutoFit/>
           </a:bodyPr>
           <a:lstStyle/>
@@ -11206,7 +11084,6 @@
           <a:lstStyle/>
           <a:p>
             <a:pPr algn="ctr"/>
-            <a:endParaRPr/>
           </a:p>
         </p:txBody>
       </p:sp>
@@ -11253,7 +11130,6 @@
           <a:lstStyle/>
           <a:p>
             <a:pPr algn="ctr"/>
-            <a:endParaRPr/>
           </a:p>
         </p:txBody>
       </p:sp>
@@ -11298,7 +11174,6 @@
           <a:lstStyle/>
           <a:p>
             <a:pPr algn="ctr"/>
-            <a:endParaRPr/>
           </a:p>
         </p:txBody>
       </p:sp>
@@ -11319,7 +11194,7 @@
           <a:noFill/>
         </p:spPr>
         <p:txBody>
-          <a:bodyPr wrap="square" lIns="0" tIns="0" rIns="0" bIns="0" anchor="ctr">
+          <a:bodyPr wrap="square" anchor="ctr" lIns="0" rIns="0" tIns="0" bIns="0">
             <a:spAutoFit/>
           </a:bodyPr>
           <a:lstStyle/>
@@ -11384,7 +11259,6 @@
           <a:lstStyle/>
           <a:p>
             <a:pPr algn="ctr"/>
-            <a:endParaRPr/>
           </a:p>
         </p:txBody>
       </p:sp>
@@ -11429,7 +11303,6 @@
           <a:lstStyle/>
           <a:p>
             <a:pPr algn="ctr"/>
-            <a:endParaRPr/>
           </a:p>
         </p:txBody>
       </p:sp>
@@ -11450,7 +11323,7 @@
           <a:noFill/>
         </p:spPr>
         <p:txBody>
-          <a:bodyPr wrap="square" lIns="0" tIns="0" rIns="0" bIns="0" anchor="ctr">
+          <a:bodyPr wrap="square" anchor="ctr" lIns="0" rIns="0" tIns="0" bIns="0">
             <a:spAutoFit/>
           </a:bodyPr>
           <a:lstStyle/>
@@ -11515,7 +11388,6 @@
           <a:lstStyle/>
           <a:p>
             <a:pPr algn="ctr"/>
-            <a:endParaRPr/>
           </a:p>
         </p:txBody>
       </p:sp>
@@ -11560,7 +11432,6 @@
           <a:lstStyle/>
           <a:p>
             <a:pPr algn="ctr"/>
-            <a:endParaRPr/>
           </a:p>
         </p:txBody>
       </p:sp>
@@ -11581,7 +11452,7 @@
           <a:noFill/>
         </p:spPr>
         <p:txBody>
-          <a:bodyPr wrap="square" lIns="0" tIns="0" rIns="0" bIns="0" anchor="ctr">
+          <a:bodyPr wrap="square" anchor="ctr" lIns="0" rIns="0" tIns="0" bIns="0">
             <a:spAutoFit/>
           </a:bodyPr>
           <a:lstStyle/>
@@ -11644,7 +11515,6 @@
           <a:lstStyle/>
           <a:p>
             <a:pPr algn="ctr"/>
-            <a:endParaRPr/>
           </a:p>
         </p:txBody>
       </p:sp>
@@ -11665,7 +11535,7 @@
           <a:noFill/>
         </p:spPr>
         <p:txBody>
-          <a:bodyPr wrap="square" lIns="0" tIns="0" rIns="0" bIns="0" anchor="t">
+          <a:bodyPr wrap="square" anchor="t" lIns="0" rIns="0" tIns="0" bIns="0">
             <a:spAutoFit/>
           </a:bodyPr>
           <a:lstStyle/>
@@ -11708,7 +11578,7 @@
           <a:noFill/>
         </p:spPr>
         <p:txBody>
-          <a:bodyPr wrap="square" lIns="0" tIns="0" rIns="0" bIns="0" anchor="t">
+          <a:bodyPr wrap="square" anchor="t" lIns="0" rIns="0" tIns="0" bIns="0">
             <a:spAutoFit/>
           </a:bodyPr>
           <a:lstStyle/>
@@ -11735,7 +11605,7 @@
 </file>
 
 <file path=ppt/slides/slide23.xml><?xml version="1.0" encoding="utf-8"?>
-<p:sld xmlns:a="http://schemas.openxmlformats.org/drawingml/2006/main" xmlns:r="http://schemas.openxmlformats.org/officeDocument/2006/relationships" xmlns:p="http://schemas.openxmlformats.org/presentationml/2006/main">
+<p:sld xmlns:a="http://schemas.openxmlformats.org/drawingml/2006/main" xmlns:p="http://schemas.openxmlformats.org/presentationml/2006/main" xmlns:r="http://schemas.openxmlformats.org/officeDocument/2006/relationships">
   <p:cSld>
     <p:bg>
       <p:bgPr>
@@ -11751,14 +11621,7 @@
         <p:cNvGrpSpPr/>
         <p:nvPr/>
       </p:nvGrpSpPr>
-      <p:grpSpPr>
-        <a:xfrm>
-          <a:off x="0" y="0"/>
-          <a:ext cx="0" cy="0"/>
-          <a:chOff x="0" y="0"/>
-          <a:chExt cx="0" cy="0"/>
-        </a:xfrm>
-      </p:grpSpPr>
+      <p:grpSpPr/>
       <p:sp>
         <p:nvSpPr>
           <p:cNvPr id="2" name="Rectangle 1"/>
@@ -11800,7 +11663,6 @@
           <a:lstStyle/>
           <a:p>
             <a:pPr algn="ctr"/>
-            <a:endParaRPr/>
           </a:p>
         </p:txBody>
       </p:sp>
@@ -11821,7 +11683,7 @@
           <a:noFill/>
         </p:spPr>
         <p:txBody>
-          <a:bodyPr wrap="square" lIns="0" tIns="0" rIns="0" bIns="0" anchor="t">
+          <a:bodyPr wrap="square" anchor="t" lIns="0" rIns="0" tIns="0" bIns="0">
             <a:spAutoFit/>
           </a:bodyPr>
           <a:lstStyle/>
@@ -11923,7 +11785,7 @@
 </file>
 
 <file path=ppt/slides/slide3.xml><?xml version="1.0" encoding="utf-8"?>
-<p:sld xmlns:a="http://schemas.openxmlformats.org/drawingml/2006/main" xmlns:r="http://schemas.openxmlformats.org/officeDocument/2006/relationships" xmlns:p="http://schemas.openxmlformats.org/presentationml/2006/main">
+<p:sld xmlns:a="http://schemas.openxmlformats.org/drawingml/2006/main" xmlns:p="http://schemas.openxmlformats.org/presentationml/2006/main" xmlns:r="http://schemas.openxmlformats.org/officeDocument/2006/relationships">
   <p:cSld>
     <p:bg>
       <p:bgPr>
@@ -11939,14 +11801,7 @@
         <p:cNvGrpSpPr/>
         <p:nvPr/>
       </p:nvGrpSpPr>
-      <p:grpSpPr>
-        <a:xfrm>
-          <a:off x="0" y="0"/>
-          <a:ext cx="0" cy="0"/>
-          <a:chOff x="0" y="0"/>
-          <a:chExt cx="0" cy="0"/>
-        </a:xfrm>
-      </p:grpSpPr>
+      <p:grpSpPr/>
       <p:sp>
         <p:nvSpPr>
           <p:cNvPr id="2" name="Rectangle 1"/>
@@ -11988,7 +11843,6 @@
           <a:lstStyle/>
           <a:p>
             <a:pPr algn="ctr"/>
-            <a:endParaRPr/>
           </a:p>
         </p:txBody>
       </p:sp>
@@ -12009,7 +11863,7 @@
           <a:noFill/>
         </p:spPr>
         <p:txBody>
-          <a:bodyPr wrap="square" lIns="0" tIns="0" rIns="0" bIns="0" anchor="t">
+          <a:bodyPr wrap="square" anchor="t" lIns="0" rIns="0" tIns="0" bIns="0">
             <a:spAutoFit/>
           </a:bodyPr>
           <a:lstStyle/>
@@ -12043,7 +11897,7 @@
           <a:noFill/>
         </p:spPr>
         <p:txBody>
-          <a:bodyPr wrap="square" lIns="0" tIns="0" rIns="0" bIns="0" anchor="t">
+          <a:bodyPr wrap="square" anchor="t" lIns="0" rIns="0" tIns="0" bIns="0">
             <a:spAutoFit/>
           </a:bodyPr>
           <a:lstStyle/>
@@ -12133,7 +11987,6 @@
           <a:lstStyle/>
           <a:p>
             <a:pPr algn="ctr"/>
-            <a:endParaRPr/>
           </a:p>
         </p:txBody>
       </p:sp>
@@ -12154,7 +12007,7 @@
           <a:noFill/>
         </p:spPr>
         <p:txBody>
-          <a:bodyPr wrap="square" lIns="0" tIns="0" rIns="0" bIns="0" anchor="t">
+          <a:bodyPr wrap="square" anchor="t" lIns="0" rIns="0" tIns="0" bIns="0">
             <a:spAutoFit/>
           </a:bodyPr>
           <a:lstStyle/>
@@ -12197,13 +12050,21 @@
           <a:noFill/>
         </p:spPr>
         <p:txBody>
-          <a:bodyPr wrap="square" lIns="0" tIns="0" rIns="0" bIns="0" anchor="t">
+          <a:bodyPr wrap="square" anchor="t" lIns="0" rIns="0" tIns="0" bIns="0">
             <a:spAutoFit/>
           </a:bodyPr>
           <a:lstStyle/>
           <a:p>
             <a:pPr algn="r"/>
-            <a:endParaRPr/>
+            <a:r>
+              <a:rPr sz="1100" b="0" i="0">
+                <a:solidFill>
+                  <a:srgbClr val="7A7A7A"/>
+                </a:solidFill>
+                <a:latin typeface="Roboto"/>
+              </a:rPr>
+              <a:t/>
+            </a:r>
           </a:p>
         </p:txBody>
       </p:sp>
@@ -12216,7 +12077,7 @@
 </file>
 
 <file path=ppt/slides/slide4.xml><?xml version="1.0" encoding="utf-8"?>
-<p:sld xmlns:a="http://schemas.openxmlformats.org/drawingml/2006/main" xmlns:r="http://schemas.openxmlformats.org/officeDocument/2006/relationships" xmlns:p="http://schemas.openxmlformats.org/presentationml/2006/main">
+<p:sld xmlns:a="http://schemas.openxmlformats.org/drawingml/2006/main" xmlns:p="http://schemas.openxmlformats.org/presentationml/2006/main" xmlns:r="http://schemas.openxmlformats.org/officeDocument/2006/relationships">
   <p:cSld>
     <p:bg>
       <p:bgPr>
@@ -12232,14 +12093,7 @@
         <p:cNvGrpSpPr/>
         <p:nvPr/>
       </p:nvGrpSpPr>
-      <p:grpSpPr>
-        <a:xfrm>
-          <a:off x="0" y="0"/>
-          <a:ext cx="0" cy="0"/>
-          <a:chOff x="0" y="0"/>
-          <a:chExt cx="0" cy="0"/>
-        </a:xfrm>
-      </p:grpSpPr>
+      <p:grpSpPr/>
       <p:sp>
         <p:nvSpPr>
           <p:cNvPr id="2" name="TextBox 1"/>
@@ -12257,7 +12111,7 @@
           <a:noFill/>
         </p:spPr>
         <p:txBody>
-          <a:bodyPr wrap="square" lIns="0" tIns="0" rIns="0" bIns="0" anchor="t">
+          <a:bodyPr wrap="square" anchor="t" lIns="0" rIns="0" tIns="0" bIns="0">
             <a:spAutoFit/>
           </a:bodyPr>
           <a:lstStyle/>
@@ -12315,7 +12169,6 @@
           <a:lstStyle/>
           <a:p>
             <a:pPr algn="ctr"/>
-            <a:endParaRPr/>
           </a:p>
         </p:txBody>
       </p:sp>
@@ -12336,7 +12189,7 @@
           <a:noFill/>
         </p:spPr>
         <p:txBody>
-          <a:bodyPr wrap="square" lIns="0" tIns="0" rIns="0" bIns="0" anchor="ctr">
+          <a:bodyPr wrap="square" anchor="ctr" lIns="0" rIns="0" tIns="0" bIns="0">
             <a:spAutoFit/>
           </a:bodyPr>
           <a:lstStyle/>
@@ -12430,7 +12283,7 @@
                 </a:solidFill>
                 <a:latin typeface="Roboto"/>
               </a:rPr>
-              <a:t>8–10 slides, one section each, with speaker notes — on the YAT Board Presentation Deck template.</a:t>
+              <a:t>8–10 slides, one section each — on the YAT Board Presentation Deck template.</a:t>
             </a:r>
           </a:p>
         </p:txBody>
@@ -12476,7 +12329,6 @@
           <a:lstStyle/>
           <a:p>
             <a:pPr algn="ctr"/>
-            <a:endParaRPr/>
           </a:p>
         </p:txBody>
       </p:sp>
@@ -12497,7 +12349,7 @@
           <a:noFill/>
         </p:spPr>
         <p:txBody>
-          <a:bodyPr wrap="square" lIns="0" tIns="0" rIns="0" bIns="0" anchor="t">
+          <a:bodyPr wrap="square" anchor="t" lIns="0" rIns="0" tIns="0" bIns="0">
             <a:spAutoFit/>
           </a:bodyPr>
           <a:lstStyle/>
@@ -12540,7 +12392,7 @@
           <a:noFill/>
         </p:spPr>
         <p:txBody>
-          <a:bodyPr wrap="square" lIns="0" tIns="0" rIns="0" bIns="0" anchor="t">
+          <a:bodyPr wrap="square" anchor="t" lIns="0" rIns="0" tIns="0" bIns="0">
             <a:spAutoFit/>
           </a:bodyPr>
           <a:lstStyle/>
@@ -12567,7 +12419,7 @@
 </file>
 
 <file path=ppt/slides/slide5.xml><?xml version="1.0" encoding="utf-8"?>
-<p:sld xmlns:a="http://schemas.openxmlformats.org/drawingml/2006/main" xmlns:r="http://schemas.openxmlformats.org/officeDocument/2006/relationships" xmlns:p="http://schemas.openxmlformats.org/presentationml/2006/main">
+<p:sld xmlns:a="http://schemas.openxmlformats.org/drawingml/2006/main" xmlns:p="http://schemas.openxmlformats.org/presentationml/2006/main" xmlns:r="http://schemas.openxmlformats.org/officeDocument/2006/relationships">
   <p:cSld>
     <p:bg>
       <p:bgPr>
@@ -12583,14 +12435,7 @@
         <p:cNvGrpSpPr/>
         <p:nvPr/>
       </p:nvGrpSpPr>
-      <p:grpSpPr>
-        <a:xfrm>
-          <a:off x="0" y="0"/>
-          <a:ext cx="0" cy="0"/>
-          <a:chOff x="0" y="0"/>
-          <a:chExt cx="0" cy="0"/>
-        </a:xfrm>
-      </p:grpSpPr>
+      <p:grpSpPr/>
       <p:sp>
         <p:nvSpPr>
           <p:cNvPr id="2" name="TextBox 1"/>
@@ -12608,7 +12453,7 @@
           <a:noFill/>
         </p:spPr>
         <p:txBody>
-          <a:bodyPr wrap="square" lIns="0" tIns="0" rIns="0" bIns="0" anchor="t">
+          <a:bodyPr wrap="square" anchor="t" lIns="0" rIns="0" tIns="0" bIns="0">
             <a:spAutoFit/>
           </a:bodyPr>
           <a:lstStyle/>
@@ -12682,7 +12527,6 @@
           <a:lstStyle/>
           <a:p>
             <a:pPr algn="ctr"/>
-            <a:endParaRPr/>
           </a:p>
         </p:txBody>
       </p:sp>
@@ -12703,7 +12547,7 @@
           <a:noFill/>
         </p:spPr>
         <p:txBody>
-          <a:bodyPr wrap="square" lIns="0" tIns="0" rIns="0" bIns="0" anchor="ctr">
+          <a:bodyPr wrap="square" anchor="ctr" lIns="0" rIns="0" tIns="0" bIns="0">
             <a:spAutoFit/>
           </a:bodyPr>
           <a:lstStyle/>
@@ -12843,7 +12687,6 @@
           <a:lstStyle/>
           <a:p>
             <a:pPr algn="ctr"/>
-            <a:endParaRPr/>
           </a:p>
         </p:txBody>
       </p:sp>
@@ -12864,7 +12707,7 @@
           <a:noFill/>
         </p:spPr>
         <p:txBody>
-          <a:bodyPr wrap="square" lIns="0" tIns="0" rIns="0" bIns="0" anchor="t">
+          <a:bodyPr wrap="square" anchor="t" lIns="0" rIns="0" tIns="0" bIns="0">
             <a:spAutoFit/>
           </a:bodyPr>
           <a:lstStyle/>
@@ -12907,7 +12750,7 @@
           <a:noFill/>
         </p:spPr>
         <p:txBody>
-          <a:bodyPr wrap="square" lIns="0" tIns="0" rIns="0" bIns="0" anchor="t">
+          <a:bodyPr wrap="square" anchor="t" lIns="0" rIns="0" tIns="0" bIns="0">
             <a:spAutoFit/>
           </a:bodyPr>
           <a:lstStyle/>
@@ -12934,7 +12777,7 @@
 </file>
 
 <file path=ppt/slides/slide6.xml><?xml version="1.0" encoding="utf-8"?>
-<p:sld xmlns:a="http://schemas.openxmlformats.org/drawingml/2006/main" xmlns:r="http://schemas.openxmlformats.org/officeDocument/2006/relationships" xmlns:p="http://schemas.openxmlformats.org/presentationml/2006/main">
+<p:sld xmlns:a="http://schemas.openxmlformats.org/drawingml/2006/main" xmlns:p="http://schemas.openxmlformats.org/presentationml/2006/main" xmlns:r="http://schemas.openxmlformats.org/officeDocument/2006/relationships">
   <p:cSld>
     <p:bg>
       <p:bgPr>
@@ -12950,14 +12793,7 @@
         <p:cNvGrpSpPr/>
         <p:nvPr/>
       </p:nvGrpSpPr>
-      <p:grpSpPr>
-        <a:xfrm>
-          <a:off x="0" y="0"/>
-          <a:ext cx="0" cy="0"/>
-          <a:chOff x="0" y="0"/>
-          <a:chExt cx="0" cy="0"/>
-        </a:xfrm>
-      </p:grpSpPr>
+      <p:grpSpPr/>
       <p:sp>
         <p:nvSpPr>
           <p:cNvPr id="2" name="TextBox 1"/>
@@ -12975,7 +12811,7 @@
           <a:noFill/>
         </p:spPr>
         <p:txBody>
-          <a:bodyPr wrap="square" lIns="0" tIns="0" rIns="0" bIns="0" anchor="t">
+          <a:bodyPr wrap="square" anchor="t" lIns="0" rIns="0" tIns="0" bIns="0">
             <a:spAutoFit/>
           </a:bodyPr>
           <a:lstStyle/>
@@ -13033,7 +12869,6 @@
           <a:lstStyle/>
           <a:p>
             <a:pPr algn="ctr"/>
-            <a:endParaRPr/>
           </a:p>
         </p:txBody>
       </p:sp>
@@ -13054,7 +12889,7 @@
           <a:noFill/>
         </p:spPr>
         <p:txBody>
-          <a:bodyPr wrap="square" lIns="0" tIns="0" rIns="0" bIns="0" anchor="ctr">
+          <a:bodyPr wrap="square" anchor="ctr" lIns="0" rIns="0" tIns="0" bIns="0">
             <a:spAutoFit/>
           </a:bodyPr>
           <a:lstStyle/>
@@ -13194,7 +13029,6 @@
           <a:lstStyle/>
           <a:p>
             <a:pPr algn="ctr"/>
-            <a:endParaRPr/>
           </a:p>
         </p:txBody>
       </p:sp>
@@ -13215,7 +13049,7 @@
           <a:noFill/>
         </p:spPr>
         <p:txBody>
-          <a:bodyPr wrap="square" lIns="0" tIns="0" rIns="0" bIns="0" anchor="t">
+          <a:bodyPr wrap="square" anchor="t" lIns="0" rIns="0" tIns="0" bIns="0">
             <a:spAutoFit/>
           </a:bodyPr>
           <a:lstStyle/>
@@ -13258,7 +13092,7 @@
           <a:noFill/>
         </p:spPr>
         <p:txBody>
-          <a:bodyPr wrap="square" lIns="0" tIns="0" rIns="0" bIns="0" anchor="t">
+          <a:bodyPr wrap="square" anchor="t" lIns="0" rIns="0" tIns="0" bIns="0">
             <a:spAutoFit/>
           </a:bodyPr>
           <a:lstStyle/>
@@ -13285,7 +13119,7 @@
 </file>
 
 <file path=ppt/slides/slide7.xml><?xml version="1.0" encoding="utf-8"?>
-<p:sld xmlns:a="http://schemas.openxmlformats.org/drawingml/2006/main" xmlns:r="http://schemas.openxmlformats.org/officeDocument/2006/relationships" xmlns:p="http://schemas.openxmlformats.org/presentationml/2006/main">
+<p:sld xmlns:a="http://schemas.openxmlformats.org/drawingml/2006/main" xmlns:p="http://schemas.openxmlformats.org/presentationml/2006/main" xmlns:r="http://schemas.openxmlformats.org/officeDocument/2006/relationships">
   <p:cSld>
     <p:bg>
       <p:bgPr>
@@ -13301,14 +13135,7 @@
         <p:cNvGrpSpPr/>
         <p:nvPr/>
       </p:nvGrpSpPr>
-      <p:grpSpPr>
-        <a:xfrm>
-          <a:off x="0" y="0"/>
-          <a:ext cx="0" cy="0"/>
-          <a:chOff x="0" y="0"/>
-          <a:chExt cx="0" cy="0"/>
-        </a:xfrm>
-      </p:grpSpPr>
+      <p:grpSpPr/>
       <p:sp>
         <p:nvSpPr>
           <p:cNvPr id="2" name="TextBox 1"/>
@@ -13326,7 +13153,7 @@
           <a:noFill/>
         </p:spPr>
         <p:txBody>
-          <a:bodyPr wrap="square" lIns="0" tIns="0" rIns="0" bIns="0" anchor="t">
+          <a:bodyPr wrap="square" anchor="t" lIns="0" rIns="0" tIns="0" bIns="0">
             <a:spAutoFit/>
           </a:bodyPr>
           <a:lstStyle/>
@@ -13384,7 +13211,6 @@
           <a:lstStyle/>
           <a:p>
             <a:pPr algn="ctr"/>
-            <a:endParaRPr/>
           </a:p>
         </p:txBody>
       </p:sp>
@@ -13405,7 +13231,7 @@
           <a:noFill/>
         </p:spPr>
         <p:txBody>
-          <a:bodyPr wrap="square" lIns="0" tIns="0" rIns="0" bIns="0" anchor="ctr">
+          <a:bodyPr wrap="square" anchor="ctr" lIns="0" rIns="0" tIns="0" bIns="0">
             <a:spAutoFit/>
           </a:bodyPr>
           <a:lstStyle/>
@@ -13638,7 +13464,6 @@
           <a:lstStyle/>
           <a:p>
             <a:pPr algn="ctr"/>
-            <a:endParaRPr/>
           </a:p>
         </p:txBody>
       </p:sp>
@@ -13659,7 +13484,7 @@
           <a:noFill/>
         </p:spPr>
         <p:txBody>
-          <a:bodyPr wrap="square" lIns="0" tIns="0" rIns="0" bIns="0" anchor="t">
+          <a:bodyPr wrap="square" anchor="t" lIns="0" rIns="0" tIns="0" bIns="0">
             <a:spAutoFit/>
           </a:bodyPr>
           <a:lstStyle/>
@@ -13702,7 +13527,7 @@
           <a:noFill/>
         </p:spPr>
         <p:txBody>
-          <a:bodyPr wrap="square" lIns="0" tIns="0" rIns="0" bIns="0" anchor="t">
+          <a:bodyPr wrap="square" anchor="t" lIns="0" rIns="0" tIns="0" bIns="0">
             <a:spAutoFit/>
           </a:bodyPr>
           <a:lstStyle/>
@@ -13729,7 +13554,7 @@
 </file>
 
 <file path=ppt/slides/slide8.xml><?xml version="1.0" encoding="utf-8"?>
-<p:sld xmlns:a="http://schemas.openxmlformats.org/drawingml/2006/main" xmlns:r="http://schemas.openxmlformats.org/officeDocument/2006/relationships" xmlns:p="http://schemas.openxmlformats.org/presentationml/2006/main">
+<p:sld xmlns:a="http://schemas.openxmlformats.org/drawingml/2006/main" xmlns:p="http://schemas.openxmlformats.org/presentationml/2006/main" xmlns:r="http://schemas.openxmlformats.org/officeDocument/2006/relationships">
   <p:cSld>
     <p:bg>
       <p:bgPr>
@@ -13745,14 +13570,7 @@
         <p:cNvGrpSpPr/>
         <p:nvPr/>
       </p:nvGrpSpPr>
-      <p:grpSpPr>
-        <a:xfrm>
-          <a:off x="0" y="0"/>
-          <a:ext cx="0" cy="0"/>
-          <a:chOff x="0" y="0"/>
-          <a:chExt cx="0" cy="0"/>
-        </a:xfrm>
-      </p:grpSpPr>
+      <p:grpSpPr/>
       <p:sp>
         <p:nvSpPr>
           <p:cNvPr id="2" name="Rectangle 1"/>
@@ -13794,7 +13612,6 @@
           <a:lstStyle/>
           <a:p>
             <a:pPr algn="ctr"/>
-            <a:endParaRPr/>
           </a:p>
         </p:txBody>
       </p:sp>
@@ -13868,7 +13685,7 @@
           <a:noFill/>
         </p:spPr>
         <p:txBody>
-          <a:bodyPr wrap="square" lIns="0" tIns="0" rIns="0" bIns="0" anchor="ctr">
+          <a:bodyPr wrap="square" anchor="ctr" lIns="0" rIns="0" tIns="0" bIns="0">
             <a:spAutoFit/>
           </a:bodyPr>
           <a:lstStyle/>
@@ -13894,7 +13711,7 @@
         <p:spPr>
           <a:xfrm>
             <a:off x="658368" y="1554480"/>
-            <a:ext cx="10881360" cy="2603020"/>
+            <a:ext cx="10881360" cy="4297680"/>
           </a:xfrm>
           <a:prstGeom prst="rect">
             <a:avLst/>
@@ -13902,7 +13719,7 @@
           <a:noFill/>
         </p:spPr>
         <p:txBody>
-          <a:bodyPr wrap="square" lIns="0" tIns="0" rIns="0" bIns="0" anchor="t">
+          <a:bodyPr wrap="square" anchor="t" lIns="0" rIns="0" tIns="0" bIns="0">
             <a:spAutoFit/>
           </a:bodyPr>
           <a:lstStyle/>
@@ -13919,7 +13736,7 @@
               </a:spcAft>
             </a:pPr>
             <a:r>
-              <a:rPr sz="1700" b="1" i="0" dirty="0">
+              <a:rPr sz="1700" b="1" i="0">
                 <a:solidFill>
                   <a:srgbClr val="EDAB0C"/>
                 </a:solidFill>
@@ -13928,13 +13745,13 @@
               <a:t>■  </a:t>
             </a:r>
             <a:r>
-              <a:rPr sz="1700" b="0" i="0" dirty="0">
+              <a:rPr sz="1700" b="0" i="0">
                 <a:solidFill>
                   <a:srgbClr val="2A2929"/>
                 </a:solidFill>
                 <a:latin typeface="Roboto"/>
               </a:rPr>
-              <a:t>Build an 8–10 slide board deck for your practice Business Case (Accounting System / Ledgerline) on the YAT Board Presentation Deck template, with speaker notes.</a:t>
+              <a:t>Build an 8–10 slide board deck for your practice Business Case (Accounting System / Ledgerline) on the YAT Board Presentation Deck template.</a:t>
             </a:r>
           </a:p>
           <a:p>
@@ -13950,7 +13767,7 @@
               </a:spcAft>
             </a:pPr>
             <a:r>
-              <a:rPr sz="2000" b="1" i="0" dirty="0">
+              <a:rPr sz="1700" b="1" i="0">
                 <a:solidFill>
                   <a:srgbClr val="EDAB0C"/>
                 </a:solidFill>
@@ -13959,7 +13776,7 @@
               <a:t>■  </a:t>
             </a:r>
             <a:r>
-              <a:rPr sz="2000" b="0" i="0" dirty="0">
+              <a:rPr sz="1700" b="0" i="0">
                 <a:solidFill>
                   <a:srgbClr val="2A2929"/>
                 </a:solidFill>
@@ -13981,7 +13798,7 @@
               </a:spcAft>
             </a:pPr>
             <a:r>
-              <a:rPr b="0" i="0" dirty="0">
+              <a:rPr sz="1400" b="0" i="0">
                 <a:solidFill>
                   <a:srgbClr val="7A7A7A"/>
                 </a:solidFill>
@@ -13990,7 +13807,7 @@
               <a:t>–  </a:t>
             </a:r>
             <a:r>
-              <a:rPr b="0" i="0" dirty="0">
+              <a:rPr sz="1400" b="0" i="0">
                 <a:solidFill>
                   <a:srgbClr val="2A2929"/>
                 </a:solidFill>
@@ -14012,7 +13829,7 @@
               </a:spcAft>
             </a:pPr>
             <a:r>
-              <a:rPr b="0" i="0" dirty="0">
+              <a:rPr sz="1400" b="0" i="0">
                 <a:solidFill>
                   <a:srgbClr val="7A7A7A"/>
                 </a:solidFill>
@@ -14021,7 +13838,7 @@
               <a:t>–  </a:t>
             </a:r>
             <a:r>
-              <a:rPr b="0" i="0" dirty="0">
+              <a:rPr sz="1400" b="0" i="0">
                 <a:solidFill>
                   <a:srgbClr val="2A2929"/>
                 </a:solidFill>
@@ -14043,7 +13860,7 @@
               </a:spcAft>
             </a:pPr>
             <a:r>
-              <a:rPr sz="2000" b="1" i="0" dirty="0">
+              <a:rPr sz="1700" b="1" i="0">
                 <a:solidFill>
                   <a:srgbClr val="EDAB0C"/>
                 </a:solidFill>
@@ -14052,7 +13869,7 @@
               <a:t>■  </a:t>
             </a:r>
             <a:r>
-              <a:rPr sz="2000" b="0" i="0" dirty="0">
+              <a:rPr sz="1700" b="0" i="0">
                 <a:solidFill>
                   <a:srgbClr val="2A2929"/>
                 </a:solidFill>
@@ -14074,7 +13891,7 @@
               </a:spcAft>
             </a:pPr>
             <a:r>
-              <a:rPr sz="2000" b="1" i="0" dirty="0">
+              <a:rPr sz="1700" b="1" i="0">
                 <a:solidFill>
                   <a:srgbClr val="EDAB0C"/>
                 </a:solidFill>
@@ -14083,7 +13900,7 @@
               <a:t>■  </a:t>
             </a:r>
             <a:r>
-              <a:rPr sz="2000" b="0" i="0" dirty="0">
+              <a:rPr sz="1700" b="0" i="0">
                 <a:solidFill>
                   <a:srgbClr val="2A2929"/>
                 </a:solidFill>
@@ -14137,7 +13954,6 @@
           <a:lstStyle/>
           <a:p>
             <a:pPr algn="ctr"/>
-            <a:endParaRPr/>
           </a:p>
         </p:txBody>
       </p:sp>
@@ -14158,7 +13974,7 @@
           <a:noFill/>
         </p:spPr>
         <p:txBody>
-          <a:bodyPr wrap="square" lIns="0" tIns="0" rIns="0" bIns="0" anchor="ctr">
+          <a:bodyPr wrap="square" anchor="ctr" lIns="0" rIns="0" tIns="0" bIns="0">
             <a:spAutoFit/>
           </a:bodyPr>
           <a:lstStyle/>
@@ -14216,7 +14032,6 @@
           <a:lstStyle/>
           <a:p>
             <a:pPr algn="ctr"/>
-            <a:endParaRPr/>
           </a:p>
         </p:txBody>
       </p:sp>
@@ -14237,7 +14052,7 @@
           <a:noFill/>
         </p:spPr>
         <p:txBody>
-          <a:bodyPr wrap="square" lIns="0" tIns="0" rIns="0" bIns="0" anchor="t">
+          <a:bodyPr wrap="square" anchor="t" lIns="0" rIns="0" tIns="0" bIns="0">
             <a:spAutoFit/>
           </a:bodyPr>
           <a:lstStyle/>
@@ -14280,7 +14095,7 @@
           <a:noFill/>
         </p:spPr>
         <p:txBody>
-          <a:bodyPr wrap="square" lIns="0" tIns="0" rIns="0" bIns="0" anchor="t">
+          <a:bodyPr wrap="square" anchor="t" lIns="0" rIns="0" tIns="0" bIns="0">
             <a:spAutoFit/>
           </a:bodyPr>
           <a:lstStyle/>
@@ -14307,7 +14122,7 @@
 </file>
 
 <file path=ppt/slides/slide9.xml><?xml version="1.0" encoding="utf-8"?>
-<p:sld xmlns:a="http://schemas.openxmlformats.org/drawingml/2006/main" xmlns:r="http://schemas.openxmlformats.org/officeDocument/2006/relationships" xmlns:p="http://schemas.openxmlformats.org/presentationml/2006/main">
+<p:sld xmlns:a="http://schemas.openxmlformats.org/drawingml/2006/main" xmlns:p="http://schemas.openxmlformats.org/presentationml/2006/main" xmlns:r="http://schemas.openxmlformats.org/officeDocument/2006/relationships">
   <p:cSld>
     <p:bg>
       <p:bgPr>
@@ -14323,14 +14138,7 @@
         <p:cNvGrpSpPr/>
         <p:nvPr/>
       </p:nvGrpSpPr>
-      <p:grpSpPr>
-        <a:xfrm>
-          <a:off x="0" y="0"/>
-          <a:ext cx="0" cy="0"/>
-          <a:chOff x="0" y="0"/>
-          <a:chExt cx="0" cy="0"/>
-        </a:xfrm>
-      </p:grpSpPr>
+      <p:grpSpPr/>
       <p:sp>
         <p:nvSpPr>
           <p:cNvPr id="2" name="TextBox 1"/>
@@ -14348,7 +14156,7 @@
           <a:noFill/>
         </p:spPr>
         <p:txBody>
-          <a:bodyPr wrap="square" lIns="0" tIns="0" rIns="0" bIns="0" anchor="t">
+          <a:bodyPr wrap="square" anchor="t" lIns="0" rIns="0" tIns="0" bIns="0">
             <a:spAutoFit/>
           </a:bodyPr>
           <a:lstStyle/>
@@ -14422,7 +14230,6 @@
           <a:lstStyle/>
           <a:p>
             <a:pPr algn="ctr"/>
-            <a:endParaRPr/>
           </a:p>
         </p:txBody>
       </p:sp>
@@ -14469,7 +14276,6 @@
           <a:lstStyle/>
           <a:p>
             <a:pPr algn="ctr"/>
-            <a:endParaRPr/>
           </a:p>
         </p:txBody>
       </p:sp>
@@ -14514,7 +14320,6 @@
           <a:lstStyle/>
           <a:p>
             <a:pPr algn="ctr"/>
-            <a:endParaRPr/>
           </a:p>
         </p:txBody>
       </p:sp>
@@ -14535,7 +14340,7 @@
           <a:noFill/>
         </p:spPr>
         <p:txBody>
-          <a:bodyPr wrap="square" lIns="0" tIns="0" rIns="0" bIns="0" anchor="ctr">
+          <a:bodyPr wrap="square" anchor="ctr" lIns="0" rIns="0" tIns="0" bIns="0">
             <a:spAutoFit/>
           </a:bodyPr>
           <a:lstStyle/>
@@ -14600,7 +14405,6 @@
           <a:lstStyle/>
           <a:p>
             <a:pPr algn="ctr"/>
-            <a:endParaRPr/>
           </a:p>
         </p:txBody>
       </p:sp>
@@ -14645,7 +14449,6 @@
           <a:lstStyle/>
           <a:p>
             <a:pPr algn="ctr"/>
-            <a:endParaRPr/>
           </a:p>
         </p:txBody>
       </p:sp>
@@ -14666,7 +14469,7 @@
           <a:noFill/>
         </p:spPr>
         <p:txBody>
-          <a:bodyPr wrap="square" lIns="0" tIns="0" rIns="0" bIns="0" anchor="ctr">
+          <a:bodyPr wrap="square" anchor="ctr" lIns="0" rIns="0" tIns="0" bIns="0">
             <a:spAutoFit/>
           </a:bodyPr>
           <a:lstStyle/>
@@ -14731,7 +14534,6 @@
           <a:lstStyle/>
           <a:p>
             <a:pPr algn="ctr"/>
-            <a:endParaRPr/>
           </a:p>
         </p:txBody>
       </p:sp>
@@ -14776,7 +14578,6 @@
           <a:lstStyle/>
           <a:p>
             <a:pPr algn="ctr"/>
-            <a:endParaRPr/>
           </a:p>
         </p:txBody>
       </p:sp>
@@ -14797,7 +14598,7 @@
           <a:noFill/>
         </p:spPr>
         <p:txBody>
-          <a:bodyPr wrap="square" lIns="0" tIns="0" rIns="0" bIns="0" anchor="ctr">
+          <a:bodyPr wrap="square" anchor="ctr" lIns="0" rIns="0" tIns="0" bIns="0">
             <a:spAutoFit/>
           </a:bodyPr>
           <a:lstStyle/>
@@ -14860,7 +14661,6 @@
           <a:lstStyle/>
           <a:p>
             <a:pPr algn="ctr"/>
-            <a:endParaRPr/>
           </a:p>
         </p:txBody>
       </p:sp>
@@ -14881,7 +14681,7 @@
           <a:noFill/>
         </p:spPr>
         <p:txBody>
-          <a:bodyPr wrap="square" lIns="0" tIns="0" rIns="0" bIns="0" anchor="t">
+          <a:bodyPr wrap="square" anchor="t" lIns="0" rIns="0" tIns="0" bIns="0">
             <a:spAutoFit/>
           </a:bodyPr>
           <a:lstStyle/>
@@ -14924,7 +14724,7 @@
           <a:noFill/>
         </p:spPr>
         <p:txBody>
-          <a:bodyPr wrap="square" lIns="0" tIns="0" rIns="0" bIns="0" anchor="t">
+          <a:bodyPr wrap="square" anchor="t" lIns="0" rIns="0" tIns="0" bIns="0">
             <a:spAutoFit/>
           </a:bodyPr>
           <a:lstStyle/>
@@ -15281,44 +15081,44 @@
         <a:sysClr val="window" lastClr="FFFFFF"/>
       </a:lt1>
       <a:dk2>
-        <a:srgbClr val="0E2841"/>
+        <a:srgbClr val="1F497D"/>
       </a:dk2>
       <a:lt2>
-        <a:srgbClr val="E8E8E8"/>
+        <a:srgbClr val="EEECE1"/>
       </a:lt2>
       <a:accent1>
-        <a:srgbClr val="156082"/>
+        <a:srgbClr val="4F81BD"/>
       </a:accent1>
       <a:accent2>
-        <a:srgbClr val="E97132"/>
+        <a:srgbClr val="C0504D"/>
       </a:accent2>
       <a:accent3>
-        <a:srgbClr val="196B24"/>
+        <a:srgbClr val="9BBB59"/>
       </a:accent3>
       <a:accent4>
-        <a:srgbClr val="0F9ED5"/>
+        <a:srgbClr val="8064A2"/>
       </a:accent4>
       <a:accent5>
-        <a:srgbClr val="A02B93"/>
+        <a:srgbClr val="4BACC6"/>
       </a:accent5>
       <a:accent6>
-        <a:srgbClr val="4EA72E"/>
+        <a:srgbClr val="F79646"/>
       </a:accent6>
       <a:hlink>
-        <a:srgbClr val="467886"/>
+        <a:srgbClr val="0000FF"/>
       </a:hlink>
       <a:folHlink>
-        <a:srgbClr val="96607D"/>
+        <a:srgbClr val="800080"/>
       </a:folHlink>
     </a:clrScheme>
     <a:fontScheme name="Office">
       <a:majorFont>
-        <a:latin typeface="Aptos Display" panose="02110004020202020204"/>
+        <a:latin typeface="Calibri"/>
         <a:ea typeface=""/>
         <a:cs typeface=""/>
-        <a:font script="Jpan" typeface="游ゴシック Light"/>
+        <a:font script="Jpan" typeface="ＭＳ Ｐゴシック"/>
         <a:font script="Hang" typeface="맑은 고딕"/>
-        <a:font script="Hans" typeface="等线 Light"/>
+        <a:font script="Hans" typeface="宋体"/>
         <a:font script="Hant" typeface="新細明體"/>
         <a:font script="Arab" typeface="Times New Roman"/>
         <a:font script="Hebr" typeface="Times New Roman"/>
@@ -15346,31 +15146,14 @@
         <a:font script="Viet" typeface="Times New Roman"/>
         <a:font script="Uigh" typeface="Microsoft Uighur"/>
         <a:font script="Geor" typeface="Sylfaen"/>
-        <a:font script="Armn" typeface="Arial"/>
-        <a:font script="Bugi" typeface="Leelawadee UI"/>
-        <a:font script="Bopo" typeface="Microsoft JhengHei"/>
-        <a:font script="Java" typeface="Javanese Text"/>
-        <a:font script="Lisu" typeface="Segoe UI"/>
-        <a:font script="Mymr" typeface="Myanmar Text"/>
-        <a:font script="Nkoo" typeface="Ebrima"/>
-        <a:font script="Olck" typeface="Nirmala UI"/>
-        <a:font script="Osma" typeface="Ebrima"/>
-        <a:font script="Phag" typeface="Phagspa"/>
-        <a:font script="Syrn" typeface="Estrangelo Edessa"/>
-        <a:font script="Syrj" typeface="Estrangelo Edessa"/>
-        <a:font script="Syre" typeface="Estrangelo Edessa"/>
-        <a:font script="Sora" typeface="Nirmala UI"/>
-        <a:font script="Tale" typeface="Microsoft Tai Le"/>
-        <a:font script="Talu" typeface="Microsoft New Tai Lue"/>
-        <a:font script="Tfng" typeface="Ebrima"/>
       </a:majorFont>
       <a:minorFont>
-        <a:latin typeface="Aptos" panose="02110004020202020204"/>
+        <a:latin typeface="Calibri"/>
         <a:ea typeface=""/>
         <a:cs typeface=""/>
-        <a:font script="Jpan" typeface="游ゴシック"/>
+        <a:font script="Jpan" typeface="ＭＳ Ｐゴシック"/>
         <a:font script="Hang" typeface="맑은 고딕"/>
-        <a:font script="Hans" typeface="等线"/>
+        <a:font script="Hans" typeface="宋体"/>
         <a:font script="Hant" typeface="新細明體"/>
         <a:font script="Arab" typeface="Arial"/>
         <a:font script="Hebr" typeface="Arial"/>
@@ -15398,23 +15181,6 @@
         <a:font script="Viet" typeface="Arial"/>
         <a:font script="Uigh" typeface="Microsoft Uighur"/>
         <a:font script="Geor" typeface="Sylfaen"/>
-        <a:font script="Armn" typeface="Arial"/>
-        <a:font script="Bugi" typeface="Leelawadee UI"/>
-        <a:font script="Bopo" typeface="Microsoft JhengHei"/>
-        <a:font script="Java" typeface="Javanese Text"/>
-        <a:font script="Lisu" typeface="Segoe UI"/>
-        <a:font script="Mymr" typeface="Myanmar Text"/>
-        <a:font script="Nkoo" typeface="Ebrima"/>
-        <a:font script="Olck" typeface="Nirmala UI"/>
-        <a:font script="Osma" typeface="Ebrima"/>
-        <a:font script="Phag" typeface="Phagspa"/>
-        <a:font script="Syrn" typeface="Estrangelo Edessa"/>
-        <a:font script="Syrj" typeface="Estrangelo Edessa"/>
-        <a:font script="Syre" typeface="Estrangelo Edessa"/>
-        <a:font script="Sora" typeface="Nirmala UI"/>
-        <a:font script="Tale" typeface="Microsoft Tai Le"/>
-        <a:font script="Talu" typeface="Microsoft New Tai Lue"/>
-        <a:font script="Tfng" typeface="Ebrima"/>
       </a:minorFont>
     </a:fontScheme>
     <a:fmtScheme name="Office">
@@ -15426,136 +15192,180 @@
           <a:gsLst>
             <a:gs pos="0">
               <a:schemeClr val="phClr">
-                <a:lumMod val="110000"/>
-                <a:satMod val="105000"/>
-                <a:tint val="67000"/>
+                <a:tint val="50000"/>
+                <a:satMod val="300000"/>
               </a:schemeClr>
             </a:gs>
-            <a:gs pos="50000">
+            <a:gs pos="35000">
               <a:schemeClr val="phClr">
-                <a:lumMod val="105000"/>
-                <a:satMod val="103000"/>
-                <a:tint val="73000"/>
+                <a:tint val="37000"/>
+                <a:satMod val="300000"/>
               </a:schemeClr>
             </a:gs>
             <a:gs pos="100000">
               <a:schemeClr val="phClr">
-                <a:lumMod val="105000"/>
-                <a:satMod val="109000"/>
-                <a:tint val="81000"/>
+                <a:tint val="15000"/>
+                <a:satMod val="350000"/>
               </a:schemeClr>
             </a:gs>
           </a:gsLst>
-          <a:lin ang="5400000" scaled="0"/>
+          <a:lin ang="16200000" scaled="1"/>
         </a:gradFill>
         <a:gradFill rotWithShape="1">
           <a:gsLst>
             <a:gs pos="0">
               <a:schemeClr val="phClr">
-                <a:satMod val="103000"/>
-                <a:lumMod val="102000"/>
-                <a:tint val="94000"/>
-              </a:schemeClr>
-            </a:gs>
-            <a:gs pos="50000">
-              <a:schemeClr val="phClr">
-                <a:satMod val="110000"/>
-                <a:lumMod val="100000"/>
+                <a:tint val="100000"/>
                 <a:shade val="100000"/>
+                <a:satMod val="130000"/>
               </a:schemeClr>
             </a:gs>
             <a:gs pos="100000">
               <a:schemeClr val="phClr">
-                <a:lumMod val="99000"/>
-                <a:satMod val="120000"/>
-                <a:shade val="78000"/>
+                <a:tint val="50000"/>
+                <a:shade val="100000"/>
+                <a:satMod val="350000"/>
               </a:schemeClr>
             </a:gs>
           </a:gsLst>
-          <a:lin ang="5400000" scaled="0"/>
+          <a:lin ang="16200000" scaled="0"/>
         </a:gradFill>
       </a:fillStyleLst>
       <a:lnStyleLst>
-        <a:ln w="12700" cap="flat" cmpd="sng" algn="ctr">
+        <a:ln w="9525" cap="flat" cmpd="sng" algn="ctr">
           <a:solidFill>
-            <a:schemeClr val="phClr"/>
+            <a:schemeClr val="phClr">
+              <a:shade val="95000"/>
+              <a:satMod val="105000"/>
+            </a:schemeClr>
           </a:solidFill>
           <a:prstDash val="solid"/>
-          <a:miter lim="800000"/>
-        </a:ln>
-        <a:ln w="19050" cap="flat" cmpd="sng" algn="ctr">
-          <a:solidFill>
-            <a:schemeClr val="phClr"/>
-          </a:solidFill>
-          <a:prstDash val="solid"/>
-          <a:miter lim="800000"/>
         </a:ln>
         <a:ln w="25400" cap="flat" cmpd="sng" algn="ctr">
           <a:solidFill>
             <a:schemeClr val="phClr"/>
           </a:solidFill>
           <a:prstDash val="solid"/>
-          <a:miter lim="800000"/>
+        </a:ln>
+        <a:ln w="38100" cap="flat" cmpd="sng" algn="ctr">
+          <a:solidFill>
+            <a:schemeClr val="phClr"/>
+          </a:solidFill>
+          <a:prstDash val="solid"/>
         </a:ln>
       </a:lnStyleLst>
       <a:effectStyleLst>
         <a:effectStyle>
-          <a:effectLst/>
-        </a:effectStyle>
-        <a:effectStyle>
-          <a:effectLst/>
+          <a:effectLst>
+            <a:outerShdw blurRad="40000" dist="20000" dir="5400000" rotWithShape="0">
+              <a:srgbClr val="000000">
+                <a:alpha val="38000"/>
+              </a:srgbClr>
+            </a:outerShdw>
+          </a:effectLst>
         </a:effectStyle>
         <a:effectStyle>
           <a:effectLst>
-            <a:outerShdw blurRad="57150" dist="19050" dir="5400000" algn="ctr" rotWithShape="0">
+            <a:outerShdw blurRad="40000" dist="23000" dir="5400000" rotWithShape="0">
               <a:srgbClr val="000000">
-                <a:alpha val="63000"/>
+                <a:alpha val="35000"/>
               </a:srgbClr>
             </a:outerShdw>
           </a:effectLst>
+        </a:effectStyle>
+        <a:effectStyle>
+          <a:effectLst>
+            <a:outerShdw blurRad="40000" dist="23000" dir="5400000" rotWithShape="0">
+              <a:srgbClr val="000000">
+                <a:alpha val="35000"/>
+              </a:srgbClr>
+            </a:outerShdw>
+          </a:effectLst>
+          <a:scene3d>
+            <a:camera prst="orthographicFront">
+              <a:rot lat="0" lon="0" rev="0"/>
+            </a:camera>
+            <a:lightRig rig="threePt" dir="t">
+              <a:rot lat="0" lon="0" rev="1200000"/>
+            </a:lightRig>
+          </a:scene3d>
+          <a:sp3d>
+            <a:bevelT w="63500" h="25400"/>
+          </a:sp3d>
         </a:effectStyle>
       </a:effectStyleLst>
       <a:bgFillStyleLst>
         <a:solidFill>
           <a:schemeClr val="phClr"/>
         </a:solidFill>
-        <a:solidFill>
-          <a:schemeClr val="phClr">
-            <a:tint val="95000"/>
-            <a:satMod val="170000"/>
-          </a:schemeClr>
-        </a:solidFill>
         <a:gradFill rotWithShape="1">
           <a:gsLst>
             <a:gs pos="0">
               <a:schemeClr val="phClr">
-                <a:tint val="93000"/>
-                <a:satMod val="150000"/>
-                <a:shade val="98000"/>
-                <a:lumMod val="102000"/>
+                <a:tint val="40000"/>
+                <a:satMod val="350000"/>
               </a:schemeClr>
             </a:gs>
-            <a:gs pos="50000">
+            <a:gs pos="40000">
               <a:schemeClr val="phClr">
-                <a:tint val="98000"/>
-                <a:satMod val="130000"/>
-                <a:shade val="90000"/>
-                <a:lumMod val="103000"/>
+                <a:tint val="45000"/>
+                <a:shade val="99000"/>
+                <a:satMod val="350000"/>
               </a:schemeClr>
             </a:gs>
             <a:gs pos="100000">
               <a:schemeClr val="phClr">
-                <a:shade val="63000"/>
-                <a:satMod val="120000"/>
+                <a:shade val="20000"/>
+                <a:satMod val="255000"/>
               </a:schemeClr>
             </a:gs>
           </a:gsLst>
-          <a:lin ang="5400000" scaled="0"/>
+          <a:path path="circle">
+            <a:fillToRect l="50000" t="-80000" r="50000" b="180000"/>
+          </a:path>
+        </a:gradFill>
+        <a:gradFill rotWithShape="1">
+          <a:gsLst>
+            <a:gs pos="0">
+              <a:schemeClr val="phClr">
+                <a:tint val="80000"/>
+                <a:satMod val="300000"/>
+              </a:schemeClr>
+            </a:gs>
+            <a:gs pos="100000">
+              <a:schemeClr val="phClr">
+                <a:shade val="30000"/>
+                <a:satMod val="200000"/>
+              </a:schemeClr>
+            </a:gs>
+          </a:gsLst>
+          <a:path path="circle">
+            <a:fillToRect l="50000" t="50000" r="50000" b="50000"/>
+          </a:path>
         </a:gradFill>
       </a:bgFillStyleLst>
     </a:fmtScheme>
   </a:themeElements>
   <a:objectDefaults>
+    <a:spDef>
+      <a:spPr/>
+      <a:bodyPr/>
+      <a:lstStyle/>
+      <a:style>
+        <a:lnRef idx="1">
+          <a:schemeClr val="accent1"/>
+        </a:lnRef>
+        <a:fillRef idx="3">
+          <a:schemeClr val="accent1"/>
+        </a:fillRef>
+        <a:effectRef idx="2">
+          <a:schemeClr val="accent1"/>
+        </a:effectRef>
+        <a:fontRef idx="minor">
+          <a:schemeClr val="lt1"/>
+        </a:fontRef>
+      </a:style>
+    </a:spDef>
     <a:lnDef>
       <a:spPr/>
       <a:bodyPr/>
@@ -15577,10 +15387,5 @@
     </a:lnDef>
   </a:objectDefaults>
   <a:extraClrSchemeLst/>
-  <a:extLst>
-    <a:ext uri="{05A4C25C-085E-4340-85A3-A5531E510DB2}">
-      <thm15:themeFamily xmlns:thm15="http://schemas.microsoft.com/office/thememl/2012/main" name="Office Theme" id="{2E142A2C-CD16-42D6-873A-C26D2A0506FA}" vid="{1BDDFF52-6CD6-40A5-AB3C-68EB2F1E4D0A}"/>
-    </a:ext>
-  </a:extLst>
 </a:theme>
 </file>